--- a/Atividade 3 - Identificação de Falhas/Finalização/Apresentação 3 - FALTAS - Saulo.pptx
+++ b/Atividade 3 - Identificação de Falhas/Finalização/Apresentação 3 - FALTAS - Saulo.pptx
@@ -5,7 +5,7 @@
     <p:sldMasterId id="2147483648" r:id="rId1"/>
   </p:sldMasterIdLst>
   <p:notesMasterIdLst>
-    <p:notesMasterId r:id="rId27"/>
+    <p:notesMasterId r:id="rId26"/>
   </p:notesMasterIdLst>
   <p:sldIdLst>
     <p:sldId id="257" r:id="rId2"/>
@@ -17,22 +17,21 @@
     <p:sldId id="400" r:id="rId8"/>
     <p:sldId id="410" r:id="rId9"/>
     <p:sldId id="405" r:id="rId10"/>
-    <p:sldId id="328" r:id="rId11"/>
-    <p:sldId id="396" r:id="rId12"/>
-    <p:sldId id="406" r:id="rId13"/>
-    <p:sldId id="407" r:id="rId14"/>
-    <p:sldId id="398" r:id="rId15"/>
-    <p:sldId id="411" r:id="rId16"/>
-    <p:sldId id="404" r:id="rId17"/>
-    <p:sldId id="397" r:id="rId18"/>
-    <p:sldId id="393" r:id="rId19"/>
-    <p:sldId id="399" r:id="rId20"/>
-    <p:sldId id="403" r:id="rId21"/>
-    <p:sldId id="409" r:id="rId22"/>
-    <p:sldId id="412" r:id="rId23"/>
-    <p:sldId id="380" r:id="rId24"/>
-    <p:sldId id="408" r:id="rId25"/>
-    <p:sldId id="273" r:id="rId26"/>
+    <p:sldId id="396" r:id="rId11"/>
+    <p:sldId id="406" r:id="rId12"/>
+    <p:sldId id="407" r:id="rId13"/>
+    <p:sldId id="398" r:id="rId14"/>
+    <p:sldId id="411" r:id="rId15"/>
+    <p:sldId id="404" r:id="rId16"/>
+    <p:sldId id="397" r:id="rId17"/>
+    <p:sldId id="393" r:id="rId18"/>
+    <p:sldId id="399" r:id="rId19"/>
+    <p:sldId id="403" r:id="rId20"/>
+    <p:sldId id="409" r:id="rId21"/>
+    <p:sldId id="412" r:id="rId22"/>
+    <p:sldId id="380" r:id="rId23"/>
+    <p:sldId id="408" r:id="rId24"/>
+    <p:sldId id="273" r:id="rId25"/>
   </p:sldIdLst>
   <p:sldSz cx="12192000" cy="6858000"/>
   <p:notesSz cx="6858000" cy="9144000"/>
@@ -221,7 +220,7 @@
           <a:p>
             <a:fld id="{05480AFB-2E3F-42DC-9796-A7A23E86EABD}" type="datetimeFigureOut">
               <a:rPr lang="pt-BR" smtClean="0"/>
-              <a:t>18/05/2026</a:t>
+              <a:t>20/05/2026</a:t>
             </a:fld>
             <a:endParaRPr lang="pt-BR"/>
           </a:p>
@@ -635,7 +634,7 @@
           <a:p>
             <a:fld id="{A7E315B1-8A60-47FC-9A9C-8EB8FFA1BE11}" type="datetimeFigureOut">
               <a:rPr lang="pt-BR" smtClean="0"/>
-              <a:t>18/05/2026</a:t>
+              <a:t>20/05/2026</a:t>
             </a:fld>
             <a:endParaRPr lang="pt-BR"/>
           </a:p>
@@ -833,7 +832,7 @@
           <a:p>
             <a:fld id="{A7E315B1-8A60-47FC-9A9C-8EB8FFA1BE11}" type="datetimeFigureOut">
               <a:rPr lang="pt-BR" smtClean="0"/>
-              <a:t>18/05/2026</a:t>
+              <a:t>20/05/2026</a:t>
             </a:fld>
             <a:endParaRPr lang="pt-BR"/>
           </a:p>
@@ -1041,7 +1040,7 @@
           <a:p>
             <a:fld id="{A7E315B1-8A60-47FC-9A9C-8EB8FFA1BE11}" type="datetimeFigureOut">
               <a:rPr lang="pt-BR" smtClean="0"/>
-              <a:t>18/05/2026</a:t>
+              <a:t>20/05/2026</a:t>
             </a:fld>
             <a:endParaRPr lang="pt-BR"/>
           </a:p>
@@ -1239,7 +1238,7 @@
           <a:p>
             <a:fld id="{A7E315B1-8A60-47FC-9A9C-8EB8FFA1BE11}" type="datetimeFigureOut">
               <a:rPr lang="pt-BR" smtClean="0"/>
-              <a:t>18/05/2026</a:t>
+              <a:t>20/05/2026</a:t>
             </a:fld>
             <a:endParaRPr lang="pt-BR"/>
           </a:p>
@@ -1514,7 +1513,7 @@
           <a:p>
             <a:fld id="{A7E315B1-8A60-47FC-9A9C-8EB8FFA1BE11}" type="datetimeFigureOut">
               <a:rPr lang="pt-BR" smtClean="0"/>
-              <a:t>18/05/2026</a:t>
+              <a:t>20/05/2026</a:t>
             </a:fld>
             <a:endParaRPr lang="pt-BR"/>
           </a:p>
@@ -1779,7 +1778,7 @@
           <a:p>
             <a:fld id="{A7E315B1-8A60-47FC-9A9C-8EB8FFA1BE11}" type="datetimeFigureOut">
               <a:rPr lang="pt-BR" smtClean="0"/>
-              <a:t>18/05/2026</a:t>
+              <a:t>20/05/2026</a:t>
             </a:fld>
             <a:endParaRPr lang="pt-BR"/>
           </a:p>
@@ -2191,7 +2190,7 @@
           <a:p>
             <a:fld id="{A7E315B1-8A60-47FC-9A9C-8EB8FFA1BE11}" type="datetimeFigureOut">
               <a:rPr lang="pt-BR" smtClean="0"/>
-              <a:t>18/05/2026</a:t>
+              <a:t>20/05/2026</a:t>
             </a:fld>
             <a:endParaRPr lang="pt-BR"/>
           </a:p>
@@ -2332,7 +2331,7 @@
           <a:p>
             <a:fld id="{A7E315B1-8A60-47FC-9A9C-8EB8FFA1BE11}" type="datetimeFigureOut">
               <a:rPr lang="pt-BR" smtClean="0"/>
-              <a:t>18/05/2026</a:t>
+              <a:t>20/05/2026</a:t>
             </a:fld>
             <a:endParaRPr lang="pt-BR"/>
           </a:p>
@@ -2445,7 +2444,7 @@
           <a:p>
             <a:fld id="{A7E315B1-8A60-47FC-9A9C-8EB8FFA1BE11}" type="datetimeFigureOut">
               <a:rPr lang="pt-BR" smtClean="0"/>
-              <a:t>18/05/2026</a:t>
+              <a:t>20/05/2026</a:t>
             </a:fld>
             <a:endParaRPr lang="pt-BR"/>
           </a:p>
@@ -2756,7 +2755,7 @@
           <a:p>
             <a:fld id="{A7E315B1-8A60-47FC-9A9C-8EB8FFA1BE11}" type="datetimeFigureOut">
               <a:rPr lang="pt-BR" smtClean="0"/>
-              <a:t>18/05/2026</a:t>
+              <a:t>20/05/2026</a:t>
             </a:fld>
             <a:endParaRPr lang="pt-BR"/>
           </a:p>
@@ -3044,7 +3043,7 @@
           <a:p>
             <a:fld id="{A7E315B1-8A60-47FC-9A9C-8EB8FFA1BE11}" type="datetimeFigureOut">
               <a:rPr lang="pt-BR" smtClean="0"/>
-              <a:t>18/05/2026</a:t>
+              <a:t>20/05/2026</a:t>
             </a:fld>
             <a:endParaRPr lang="pt-BR"/>
           </a:p>
@@ -3285,7 +3284,7 @@
           <a:p>
             <a:fld id="{A7E315B1-8A60-47FC-9A9C-8EB8FFA1BE11}" type="datetimeFigureOut">
               <a:rPr lang="pt-BR" smtClean="0"/>
-              <a:t>18/05/2026</a:t>
+              <a:t>20/05/2026</a:t>
             </a:fld>
             <a:endParaRPr lang="pt-BR"/>
           </a:p>
@@ -4042,7 +4041,7 @@
         <p:cNvPr id="1" name="">
           <a:extLst>
             <a:ext uri="{FF2B5EF4-FFF2-40B4-BE49-F238E27FC236}">
-              <a16:creationId xmlns:a16="http://schemas.microsoft.com/office/drawing/2014/main" id="{94C1691E-0DB6-977A-2812-20DE0C16C012}"/>
+              <a16:creationId xmlns:a16="http://schemas.microsoft.com/office/drawing/2014/main" id="{36D9C110-54C0-0AF4-6662-158D016FCDFD}"/>
             </a:ext>
           </a:extLst>
         </p:cNvPr>
@@ -4062,7 +4061,7 @@
           <p:cNvPr id="6" name="Conector reto 5">
             <a:extLst>
               <a:ext uri="{FF2B5EF4-FFF2-40B4-BE49-F238E27FC236}">
-                <a16:creationId xmlns:a16="http://schemas.microsoft.com/office/drawing/2014/main" id="{DF4A77AE-98BF-6AB0-F12A-7C6E079269D6}"/>
+                <a16:creationId xmlns:a16="http://schemas.microsoft.com/office/drawing/2014/main" id="{CD4602EC-D638-1B0B-51E5-84287208B2A0}"/>
               </a:ext>
             </a:extLst>
           </p:cNvPr>
@@ -4101,7 +4100,7 @@
           <p:cNvPr id="12" name="CaixaDeTexto 11">
             <a:extLst>
               <a:ext uri="{FF2B5EF4-FFF2-40B4-BE49-F238E27FC236}">
-                <a16:creationId xmlns:a16="http://schemas.microsoft.com/office/drawing/2014/main" id="{62A9710B-BF0B-3D4E-0E41-FD3374605F7E}"/>
+                <a16:creationId xmlns:a16="http://schemas.microsoft.com/office/drawing/2014/main" id="{B539C13A-4284-7563-764A-4DEF5C5384D7}"/>
               </a:ext>
             </a:extLst>
           </p:cNvPr>
@@ -4145,7 +4144,7 @@
           <p:cNvPr id="5" name="CaixaDeTexto 4">
             <a:extLst>
               <a:ext uri="{FF2B5EF4-FFF2-40B4-BE49-F238E27FC236}">
-                <a16:creationId xmlns:a16="http://schemas.microsoft.com/office/drawing/2014/main" id="{345CE97E-8B3E-E644-5E83-3B543B6AAC28}"/>
+                <a16:creationId xmlns:a16="http://schemas.microsoft.com/office/drawing/2014/main" id="{C3CC95E5-8E56-6993-8753-4663E59E7037}"/>
               </a:ext>
             </a:extLst>
           </p:cNvPr>
@@ -4191,7 +4190,7 @@
           <p:cNvPr id="2" name="Título 1">
             <a:extLst>
               <a:ext uri="{FF2B5EF4-FFF2-40B4-BE49-F238E27FC236}">
-                <a16:creationId xmlns:a16="http://schemas.microsoft.com/office/drawing/2014/main" id="{655403EF-73DD-01FA-8741-3BC7A54BCE43}"/>
+                <a16:creationId xmlns:a16="http://schemas.microsoft.com/office/drawing/2014/main" id="{12730518-3C21-EEC5-AA9A-7FFEFF2A6EF0}"/>
               </a:ext>
             </a:extLst>
           </p:cNvPr>
@@ -4265,7 +4264,7 @@
           <p:cNvPr id="3" name="Picture 2" descr="Logomarcas">
             <a:extLst>
               <a:ext uri="{FF2B5EF4-FFF2-40B4-BE49-F238E27FC236}">
-                <a16:creationId xmlns:a16="http://schemas.microsoft.com/office/drawing/2014/main" id="{A7F4A596-59DD-FBD7-5691-0A6049AB1925}"/>
+                <a16:creationId xmlns:a16="http://schemas.microsoft.com/office/drawing/2014/main" id="{660FD321-1A8A-E0DD-0DE9-77A4D6F0773C}"/>
               </a:ext>
             </a:extLst>
           </p:cNvPr>
@@ -4312,7 +4311,7 @@
           <p:cNvPr id="4" name="Rectangle 1">
             <a:extLst>
               <a:ext uri="{FF2B5EF4-FFF2-40B4-BE49-F238E27FC236}">
-                <a16:creationId xmlns:a16="http://schemas.microsoft.com/office/drawing/2014/main" id="{7D90837C-1B37-674A-BA7F-002E2A9E2E28}"/>
+                <a16:creationId xmlns:a16="http://schemas.microsoft.com/office/drawing/2014/main" id="{4DACCC0E-8BE4-5FA9-772A-6F24D088C47D}"/>
               </a:ext>
             </a:extLst>
           </p:cNvPr>
@@ -4384,10 +4383,14 @@
               </a:spcAft>
             </a:pPr>
             <a:r>
-              <a:rPr lang="pt-BR" sz="1600" b="1" dirty="0">
+              <a:rPr kumimoji="0" lang="pt-BR" altLang="pt-BR" sz="1600" b="1" u="none" strike="noStrike" cap="none" normalizeH="0" baseline="0" dirty="0">
+                <a:ln>
+                  <a:noFill/>
+                </a:ln>
+                <a:effectLst/>
                 <a:latin typeface="+mj-lt"/>
               </a:rPr>
-              <a:t>MÉTODOS UTILIZADOS</a:t>
+              <a:t>ESTATÍSTICAS UTILIZADAS</a:t>
             </a:r>
             <a:endParaRPr kumimoji="0" lang="pt-BR" altLang="pt-BR" sz="1600" u="none" strike="noStrike" cap="none" normalizeH="0" baseline="0" dirty="0">
               <a:ln>
@@ -4399,12 +4402,196 @@
           </a:p>
         </p:txBody>
       </p:sp>
+      <p:sp>
+        <p:nvSpPr>
+          <p:cNvPr id="10" name="CaixaDeTexto 9">
+            <a:extLst>
+              <a:ext uri="{FF2B5EF4-FFF2-40B4-BE49-F238E27FC236}">
+                <a16:creationId xmlns:a16="http://schemas.microsoft.com/office/drawing/2014/main" id="{80BCDC8D-5442-BC80-EA27-A765152AAC7A}"/>
+              </a:ext>
+            </a:extLst>
+          </p:cNvPr>
+          <p:cNvSpPr txBox="1"/>
+          <p:nvPr/>
+        </p:nvSpPr>
+        <p:spPr>
+          <a:xfrm>
+            <a:off x="1234723" y="2056526"/>
+            <a:ext cx="4177714" cy="338554"/>
+          </a:xfrm>
+          <a:prstGeom prst="rect">
+            <a:avLst/>
+          </a:prstGeom>
+          <a:noFill/>
+        </p:spPr>
+        <p:txBody>
+          <a:bodyPr wrap="square">
+            <a:spAutoFit/>
+          </a:bodyPr>
+          <a:lstStyle/>
+          <a:p>
+            <a:r>
+              <a:rPr lang="pt-BR" sz="1600" b="1" dirty="0"/>
+              <a:t>Estatística T² de </a:t>
+            </a:r>
+            <a:r>
+              <a:rPr lang="pt-BR" sz="1600" b="1" dirty="0" err="1"/>
+              <a:t>Hotelling</a:t>
+            </a:r>
+            <a:endParaRPr lang="pt-BR" sz="1600" dirty="0"/>
+          </a:p>
+        </p:txBody>
+      </p:sp>
+      <p:cxnSp>
+        <p:nvCxnSpPr>
+          <p:cNvPr id="20" name="Conector reto 19">
+            <a:extLst>
+              <a:ext uri="{FF2B5EF4-FFF2-40B4-BE49-F238E27FC236}">
+                <a16:creationId xmlns:a16="http://schemas.microsoft.com/office/drawing/2014/main" id="{9A912E53-EE47-BDA8-8E1C-C8DE1E19799B}"/>
+              </a:ext>
+            </a:extLst>
+          </p:cNvPr>
+          <p:cNvCxnSpPr>
+            <a:cxnSpLocks/>
+          </p:cNvCxnSpPr>
+          <p:nvPr/>
+        </p:nvCxnSpPr>
+        <p:spPr>
+          <a:xfrm>
+            <a:off x="6096000" y="1808874"/>
+            <a:ext cx="0" cy="4216698"/>
+          </a:xfrm>
+          <a:prstGeom prst="line">
+            <a:avLst/>
+          </a:prstGeom>
+        </p:spPr>
+        <p:style>
+          <a:lnRef idx="2">
+            <a:schemeClr val="accent1"/>
+          </a:lnRef>
+          <a:fillRef idx="0">
+            <a:schemeClr val="accent1"/>
+          </a:fillRef>
+          <a:effectRef idx="1">
+            <a:schemeClr val="accent1"/>
+          </a:effectRef>
+          <a:fontRef idx="minor">
+            <a:schemeClr val="tx1"/>
+          </a:fontRef>
+        </p:style>
+      </p:cxnSp>
+      <p:sp>
+        <p:nvSpPr>
+          <p:cNvPr id="21" name="CaixaDeTexto 20">
+            <a:extLst>
+              <a:ext uri="{FF2B5EF4-FFF2-40B4-BE49-F238E27FC236}">
+                <a16:creationId xmlns:a16="http://schemas.microsoft.com/office/drawing/2014/main" id="{3B3E56C5-3029-A73A-37F6-8C5EFF6E5E80}"/>
+              </a:ext>
+            </a:extLst>
+          </p:cNvPr>
+          <p:cNvSpPr txBox="1"/>
+          <p:nvPr/>
+        </p:nvSpPr>
+        <p:spPr>
+          <a:xfrm>
+            <a:off x="6250869" y="2056526"/>
+            <a:ext cx="5116063" cy="338554"/>
+          </a:xfrm>
+          <a:prstGeom prst="rect">
+            <a:avLst/>
+          </a:prstGeom>
+          <a:noFill/>
+        </p:spPr>
+        <p:txBody>
+          <a:bodyPr wrap="square">
+            <a:spAutoFit/>
+          </a:bodyPr>
+          <a:lstStyle/>
+          <a:p>
+            <a:r>
+              <a:rPr lang="pt-BR" sz="1600" b="1" dirty="0"/>
+              <a:t>SPE - Erro Quadrático de Predição (Estatística Q)</a:t>
+            </a:r>
+            <a:endParaRPr lang="pt-BR" sz="1600" dirty="0"/>
+          </a:p>
+        </p:txBody>
+      </p:sp>
+      <p:sp>
+        <p:nvSpPr>
+          <p:cNvPr id="23" name="CaixaDeTexto 22">
+            <a:extLst>
+              <a:ext uri="{FF2B5EF4-FFF2-40B4-BE49-F238E27FC236}">
+                <a16:creationId xmlns:a16="http://schemas.microsoft.com/office/drawing/2014/main" id="{C53E9E08-34D1-7F07-82A2-FB720018CE92}"/>
+              </a:ext>
+            </a:extLst>
+          </p:cNvPr>
+          <p:cNvSpPr txBox="1"/>
+          <p:nvPr/>
+        </p:nvSpPr>
+        <p:spPr>
+          <a:xfrm>
+            <a:off x="1223682" y="2703845"/>
+            <a:ext cx="4602350" cy="738664"/>
+          </a:xfrm>
+          <a:prstGeom prst="rect">
+            <a:avLst/>
+          </a:prstGeom>
+          <a:noFill/>
+        </p:spPr>
+        <p:txBody>
+          <a:bodyPr wrap="square">
+            <a:spAutoFit/>
+          </a:bodyPr>
+          <a:lstStyle/>
+          <a:p>
+            <a:r>
+              <a:rPr lang="pt-BR" sz="1400" dirty="0"/>
+              <a:t>Indicador da variação de uma nova medição dentro do que o modelo espera que aconteça. Ou seja, analisa modificações internas.</a:t>
+            </a:r>
+          </a:p>
+        </p:txBody>
+      </p:sp>
+      <p:sp>
+        <p:nvSpPr>
+          <p:cNvPr id="24" name="CaixaDeTexto 23">
+            <a:extLst>
+              <a:ext uri="{FF2B5EF4-FFF2-40B4-BE49-F238E27FC236}">
+                <a16:creationId xmlns:a16="http://schemas.microsoft.com/office/drawing/2014/main" id="{75F3F49D-86AF-460A-1806-7EC6969C702B}"/>
+              </a:ext>
+            </a:extLst>
+          </p:cNvPr>
+          <p:cNvSpPr txBox="1"/>
+          <p:nvPr/>
+        </p:nvSpPr>
+        <p:spPr>
+          <a:xfrm>
+            <a:off x="1234723" y="4419671"/>
+            <a:ext cx="4602350" cy="307777"/>
+          </a:xfrm>
+          <a:prstGeom prst="rect">
+            <a:avLst/>
+          </a:prstGeom>
+          <a:noFill/>
+        </p:spPr>
+        <p:txBody>
+          <a:bodyPr wrap="square">
+            <a:spAutoFit/>
+          </a:bodyPr>
+          <a:lstStyle/>
+          <a:p>
+            <a:r>
+              <a:rPr lang="pt-BR" sz="1400" dirty="0"/>
+              <a:t>O limite, sob hipótese nula de operação normal é:</a:t>
+            </a:r>
+          </a:p>
+        </p:txBody>
+      </p:sp>
       <p:pic>
         <p:nvPicPr>
-          <p:cNvPr id="15" name="Imagem 14">
-            <a:extLst>
-              <a:ext uri="{FF2B5EF4-FFF2-40B4-BE49-F238E27FC236}">
-                <a16:creationId xmlns:a16="http://schemas.microsoft.com/office/drawing/2014/main" id="{0E39FC90-22CF-2991-4F06-E5D05E35837E}"/>
+          <p:cNvPr id="26" name="Imagem 25">
+            <a:extLst>
+              <a:ext uri="{FF2B5EF4-FFF2-40B4-BE49-F238E27FC236}">
+                <a16:creationId xmlns:a16="http://schemas.microsoft.com/office/drawing/2014/main" id="{FFDEA4E1-F0D8-B510-7897-65B862433ABC}"/>
               </a:ext>
             </a:extLst>
           </p:cNvPr>
@@ -4421,8 +4608,168 @@
         </p:blipFill>
         <p:spPr>
           <a:xfrm>
-            <a:off x="2223546" y="2086261"/>
-            <a:ext cx="7744906" cy="3791479"/>
+            <a:off x="2455943" y="3732069"/>
+            <a:ext cx="1724231" cy="529129"/>
+          </a:xfrm>
+          <a:prstGeom prst="rect">
+            <a:avLst/>
+          </a:prstGeom>
+        </p:spPr>
+      </p:pic>
+      <p:pic>
+        <p:nvPicPr>
+          <p:cNvPr id="28" name="Imagem 27">
+            <a:extLst>
+              <a:ext uri="{FF2B5EF4-FFF2-40B4-BE49-F238E27FC236}">
+                <a16:creationId xmlns:a16="http://schemas.microsoft.com/office/drawing/2014/main" id="{E65EF6F4-136E-C86B-21FF-ED680B34FF73}"/>
+              </a:ext>
+            </a:extLst>
+          </p:cNvPr>
+          <p:cNvPicPr>
+            <a:picLocks noChangeAspect="1"/>
+          </p:cNvPicPr>
+          <p:nvPr/>
+        </p:nvPicPr>
+        <p:blipFill>
+          <a:blip r:embed="rId4"/>
+          <a:stretch>
+            <a:fillRect/>
+          </a:stretch>
+        </p:blipFill>
+        <p:spPr>
+          <a:xfrm>
+            <a:off x="1962539" y="5115619"/>
+            <a:ext cx="3124636" cy="800212"/>
+          </a:xfrm>
+          <a:prstGeom prst="rect">
+            <a:avLst/>
+          </a:prstGeom>
+        </p:spPr>
+      </p:pic>
+      <p:pic>
+        <p:nvPicPr>
+          <p:cNvPr id="30" name="Imagem 29">
+            <a:extLst>
+              <a:ext uri="{FF2B5EF4-FFF2-40B4-BE49-F238E27FC236}">
+                <a16:creationId xmlns:a16="http://schemas.microsoft.com/office/drawing/2014/main" id="{1FD01943-AD60-0C95-7504-993600FEA55E}"/>
+              </a:ext>
+            </a:extLst>
+          </p:cNvPr>
+          <p:cNvPicPr>
+            <a:picLocks noChangeAspect="1"/>
+          </p:cNvPicPr>
+          <p:nvPr/>
+        </p:nvPicPr>
+        <p:blipFill>
+          <a:blip r:embed="rId5"/>
+          <a:stretch>
+            <a:fillRect/>
+          </a:stretch>
+        </p:blipFill>
+        <p:spPr>
+          <a:xfrm>
+            <a:off x="7321997" y="3464236"/>
+            <a:ext cx="3362367" cy="490345"/>
+          </a:xfrm>
+          <a:prstGeom prst="rect">
+            <a:avLst/>
+          </a:prstGeom>
+        </p:spPr>
+      </p:pic>
+      <p:sp>
+        <p:nvSpPr>
+          <p:cNvPr id="31" name="CaixaDeTexto 30">
+            <a:extLst>
+              <a:ext uri="{FF2B5EF4-FFF2-40B4-BE49-F238E27FC236}">
+                <a16:creationId xmlns:a16="http://schemas.microsoft.com/office/drawing/2014/main" id="{AD0CC14C-D7A7-FB3B-6DCF-2003BF1B7A1D}"/>
+              </a:ext>
+            </a:extLst>
+          </p:cNvPr>
+          <p:cNvSpPr txBox="1"/>
+          <p:nvPr/>
+        </p:nvSpPr>
+        <p:spPr>
+          <a:xfrm>
+            <a:off x="6365970" y="2675997"/>
+            <a:ext cx="5236094" cy="523220"/>
+          </a:xfrm>
+          <a:prstGeom prst="rect">
+            <a:avLst/>
+          </a:prstGeom>
+          <a:noFill/>
+        </p:spPr>
+        <p:txBody>
+          <a:bodyPr wrap="square">
+            <a:spAutoFit/>
+          </a:bodyPr>
+          <a:lstStyle/>
+          <a:p>
+            <a:r>
+              <a:rPr lang="pt-BR" sz="1400" dirty="0"/>
+              <a:t>Mede o erro residual, ou seja, aquilo que o modelo não conseguiu explicar ou reconstruir.</a:t>
+            </a:r>
+          </a:p>
+        </p:txBody>
+      </p:sp>
+      <p:sp>
+        <p:nvSpPr>
+          <p:cNvPr id="32" name="CaixaDeTexto 31">
+            <a:extLst>
+              <a:ext uri="{FF2B5EF4-FFF2-40B4-BE49-F238E27FC236}">
+                <a16:creationId xmlns:a16="http://schemas.microsoft.com/office/drawing/2014/main" id="{47A7F5F9-7063-18B8-D4CE-F551D693EB6B}"/>
+              </a:ext>
+            </a:extLst>
+          </p:cNvPr>
+          <p:cNvSpPr txBox="1"/>
+          <p:nvPr/>
+        </p:nvSpPr>
+        <p:spPr>
+          <a:xfrm>
+            <a:off x="6365969" y="4339339"/>
+            <a:ext cx="5236094" cy="307777"/>
+          </a:xfrm>
+          <a:prstGeom prst="rect">
+            <a:avLst/>
+          </a:prstGeom>
+          <a:noFill/>
+        </p:spPr>
+        <p:txBody>
+          <a:bodyPr wrap="square">
+            <a:spAutoFit/>
+          </a:bodyPr>
+          <a:lstStyle/>
+          <a:p>
+            <a:r>
+              <a:rPr lang="pt-BR" sz="1400" dirty="0"/>
+              <a:t>Limite do resíduo, dentro do que é esperado por ele.</a:t>
+            </a:r>
+          </a:p>
+        </p:txBody>
+      </p:sp>
+      <p:pic>
+        <p:nvPicPr>
+          <p:cNvPr id="34" name="Imagem 33">
+            <a:extLst>
+              <a:ext uri="{FF2B5EF4-FFF2-40B4-BE49-F238E27FC236}">
+                <a16:creationId xmlns:a16="http://schemas.microsoft.com/office/drawing/2014/main" id="{3370E8B9-358D-3ECA-FA88-07C972C4DF76}"/>
+              </a:ext>
+            </a:extLst>
+          </p:cNvPr>
+          <p:cNvPicPr>
+            <a:picLocks noChangeAspect="1"/>
+          </p:cNvPicPr>
+          <p:nvPr/>
+        </p:nvPicPr>
+        <p:blipFill>
+          <a:blip r:embed="rId6"/>
+          <a:stretch>
+            <a:fillRect/>
+          </a:stretch>
+        </p:blipFill>
+        <p:spPr>
+          <a:xfrm>
+            <a:off x="6886827" y="4793881"/>
+            <a:ext cx="4194378" cy="1153817"/>
           </a:xfrm>
           <a:prstGeom prst="rect">
             <a:avLst/>
@@ -4432,7 +4779,7 @@
     </p:spTree>
     <p:extLst>
       <p:ext uri="{BB962C8B-B14F-4D97-AF65-F5344CB8AC3E}">
-        <p14:creationId xmlns:p14="http://schemas.microsoft.com/office/powerpoint/2010/main" val="4201238538"/>
+        <p14:creationId xmlns:p14="http://schemas.microsoft.com/office/powerpoint/2010/main" val="2362310258"/>
       </p:ext>
     </p:extLst>
   </p:cSld>
@@ -4450,7 +4797,7 @@
         <p:cNvPr id="1" name="">
           <a:extLst>
             <a:ext uri="{FF2B5EF4-FFF2-40B4-BE49-F238E27FC236}">
-              <a16:creationId xmlns:a16="http://schemas.microsoft.com/office/drawing/2014/main" id="{36D9C110-54C0-0AF4-6662-158D016FCDFD}"/>
+              <a16:creationId xmlns:a16="http://schemas.microsoft.com/office/drawing/2014/main" id="{5F992987-6349-4015-B3C7-235C87E3BB7E}"/>
             </a:ext>
           </a:extLst>
         </p:cNvPr>
@@ -4470,7 +4817,7 @@
           <p:cNvPr id="6" name="Conector reto 5">
             <a:extLst>
               <a:ext uri="{FF2B5EF4-FFF2-40B4-BE49-F238E27FC236}">
-                <a16:creationId xmlns:a16="http://schemas.microsoft.com/office/drawing/2014/main" id="{CD4602EC-D638-1B0B-51E5-84287208B2A0}"/>
+                <a16:creationId xmlns:a16="http://schemas.microsoft.com/office/drawing/2014/main" id="{3C0E5BE8-D4E1-2D14-C89A-7C86074F4D22}"/>
               </a:ext>
             </a:extLst>
           </p:cNvPr>
@@ -4509,7 +4856,7 @@
           <p:cNvPr id="12" name="CaixaDeTexto 11">
             <a:extLst>
               <a:ext uri="{FF2B5EF4-FFF2-40B4-BE49-F238E27FC236}">
-                <a16:creationId xmlns:a16="http://schemas.microsoft.com/office/drawing/2014/main" id="{B539C13A-4284-7563-764A-4DEF5C5384D7}"/>
+                <a16:creationId xmlns:a16="http://schemas.microsoft.com/office/drawing/2014/main" id="{3C222E33-A0B3-CBE8-3367-EE02D6E66D70}"/>
               </a:ext>
             </a:extLst>
           </p:cNvPr>
@@ -4553,7 +4900,7 @@
           <p:cNvPr id="5" name="CaixaDeTexto 4">
             <a:extLst>
               <a:ext uri="{FF2B5EF4-FFF2-40B4-BE49-F238E27FC236}">
-                <a16:creationId xmlns:a16="http://schemas.microsoft.com/office/drawing/2014/main" id="{C3CC95E5-8E56-6993-8753-4663E59E7037}"/>
+                <a16:creationId xmlns:a16="http://schemas.microsoft.com/office/drawing/2014/main" id="{BC04B27C-955F-A438-8B9F-99D6C9BA1DB8}"/>
               </a:ext>
             </a:extLst>
           </p:cNvPr>
@@ -4599,7 +4946,7 @@
           <p:cNvPr id="2" name="Título 1">
             <a:extLst>
               <a:ext uri="{FF2B5EF4-FFF2-40B4-BE49-F238E27FC236}">
-                <a16:creationId xmlns:a16="http://schemas.microsoft.com/office/drawing/2014/main" id="{12730518-3C21-EEC5-AA9A-7FFEFF2A6EF0}"/>
+                <a16:creationId xmlns:a16="http://schemas.microsoft.com/office/drawing/2014/main" id="{C90CBF96-FD9D-FB60-9F1D-ADCD704F9559}"/>
               </a:ext>
             </a:extLst>
           </p:cNvPr>
@@ -4673,7 +5020,7 @@
           <p:cNvPr id="3" name="Picture 2" descr="Logomarcas">
             <a:extLst>
               <a:ext uri="{FF2B5EF4-FFF2-40B4-BE49-F238E27FC236}">
-                <a16:creationId xmlns:a16="http://schemas.microsoft.com/office/drawing/2014/main" id="{660FD321-1A8A-E0DD-0DE9-77A4D6F0773C}"/>
+                <a16:creationId xmlns:a16="http://schemas.microsoft.com/office/drawing/2014/main" id="{45041160-6D50-CD04-72C4-7D925D35140B}"/>
               </a:ext>
             </a:extLst>
           </p:cNvPr>
@@ -4720,7 +5067,7 @@
           <p:cNvPr id="4" name="Rectangle 1">
             <a:extLst>
               <a:ext uri="{FF2B5EF4-FFF2-40B4-BE49-F238E27FC236}">
-                <a16:creationId xmlns:a16="http://schemas.microsoft.com/office/drawing/2014/main" id="{4DACCC0E-8BE4-5FA9-772A-6F24D088C47D}"/>
+                <a16:creationId xmlns:a16="http://schemas.microsoft.com/office/drawing/2014/main" id="{7AB46DB3-4ADE-6D7A-1BB6-D51662B3C3A6}"/>
               </a:ext>
             </a:extLst>
           </p:cNvPr>
@@ -4811,196 +5158,12 @@
           </a:p>
         </p:txBody>
       </p:sp>
-      <p:sp>
-        <p:nvSpPr>
-          <p:cNvPr id="10" name="CaixaDeTexto 9">
-            <a:extLst>
-              <a:ext uri="{FF2B5EF4-FFF2-40B4-BE49-F238E27FC236}">
-                <a16:creationId xmlns:a16="http://schemas.microsoft.com/office/drawing/2014/main" id="{80BCDC8D-5442-BC80-EA27-A765152AAC7A}"/>
-              </a:ext>
-            </a:extLst>
-          </p:cNvPr>
-          <p:cNvSpPr txBox="1"/>
-          <p:nvPr/>
-        </p:nvSpPr>
-        <p:spPr>
-          <a:xfrm>
-            <a:off x="1234723" y="2056526"/>
-            <a:ext cx="4177714" cy="338554"/>
-          </a:xfrm>
-          <a:prstGeom prst="rect">
-            <a:avLst/>
-          </a:prstGeom>
-          <a:noFill/>
-        </p:spPr>
-        <p:txBody>
-          <a:bodyPr wrap="square">
-            <a:spAutoFit/>
-          </a:bodyPr>
-          <a:lstStyle/>
-          <a:p>
-            <a:r>
-              <a:rPr lang="pt-BR" sz="1600" b="1" dirty="0"/>
-              <a:t>Estatística T² de </a:t>
-            </a:r>
-            <a:r>
-              <a:rPr lang="pt-BR" sz="1600" b="1" dirty="0" err="1"/>
-              <a:t>Hotelling</a:t>
-            </a:r>
-            <a:endParaRPr lang="pt-BR" sz="1600" dirty="0"/>
-          </a:p>
-        </p:txBody>
-      </p:sp>
-      <p:cxnSp>
-        <p:nvCxnSpPr>
-          <p:cNvPr id="20" name="Conector reto 19">
-            <a:extLst>
-              <a:ext uri="{FF2B5EF4-FFF2-40B4-BE49-F238E27FC236}">
-                <a16:creationId xmlns:a16="http://schemas.microsoft.com/office/drawing/2014/main" id="{9A912E53-EE47-BDA8-8E1C-C8DE1E19799B}"/>
-              </a:ext>
-            </a:extLst>
-          </p:cNvPr>
-          <p:cNvCxnSpPr>
-            <a:cxnSpLocks/>
-          </p:cNvCxnSpPr>
-          <p:nvPr/>
-        </p:nvCxnSpPr>
-        <p:spPr>
-          <a:xfrm>
-            <a:off x="6096000" y="1808874"/>
-            <a:ext cx="0" cy="4216698"/>
-          </a:xfrm>
-          <a:prstGeom prst="line">
-            <a:avLst/>
-          </a:prstGeom>
-        </p:spPr>
-        <p:style>
-          <a:lnRef idx="2">
-            <a:schemeClr val="accent1"/>
-          </a:lnRef>
-          <a:fillRef idx="0">
-            <a:schemeClr val="accent1"/>
-          </a:fillRef>
-          <a:effectRef idx="1">
-            <a:schemeClr val="accent1"/>
-          </a:effectRef>
-          <a:fontRef idx="minor">
-            <a:schemeClr val="tx1"/>
-          </a:fontRef>
-        </p:style>
-      </p:cxnSp>
-      <p:sp>
-        <p:nvSpPr>
-          <p:cNvPr id="21" name="CaixaDeTexto 20">
-            <a:extLst>
-              <a:ext uri="{FF2B5EF4-FFF2-40B4-BE49-F238E27FC236}">
-                <a16:creationId xmlns:a16="http://schemas.microsoft.com/office/drawing/2014/main" id="{3B3E56C5-3029-A73A-37F6-8C5EFF6E5E80}"/>
-              </a:ext>
-            </a:extLst>
-          </p:cNvPr>
-          <p:cNvSpPr txBox="1"/>
-          <p:nvPr/>
-        </p:nvSpPr>
-        <p:spPr>
-          <a:xfrm>
-            <a:off x="6250869" y="2056526"/>
-            <a:ext cx="5116063" cy="338554"/>
-          </a:xfrm>
-          <a:prstGeom prst="rect">
-            <a:avLst/>
-          </a:prstGeom>
-          <a:noFill/>
-        </p:spPr>
-        <p:txBody>
-          <a:bodyPr wrap="square">
-            <a:spAutoFit/>
-          </a:bodyPr>
-          <a:lstStyle/>
-          <a:p>
-            <a:r>
-              <a:rPr lang="pt-BR" sz="1600" b="1" dirty="0"/>
-              <a:t>SPE - Erro Quadrático de Predição (Estatística Q)</a:t>
-            </a:r>
-            <a:endParaRPr lang="pt-BR" sz="1600" dirty="0"/>
-          </a:p>
-        </p:txBody>
-      </p:sp>
-      <p:sp>
-        <p:nvSpPr>
-          <p:cNvPr id="23" name="CaixaDeTexto 22">
-            <a:extLst>
-              <a:ext uri="{FF2B5EF4-FFF2-40B4-BE49-F238E27FC236}">
-                <a16:creationId xmlns:a16="http://schemas.microsoft.com/office/drawing/2014/main" id="{C53E9E08-34D1-7F07-82A2-FB720018CE92}"/>
-              </a:ext>
-            </a:extLst>
-          </p:cNvPr>
-          <p:cNvSpPr txBox="1"/>
-          <p:nvPr/>
-        </p:nvSpPr>
-        <p:spPr>
-          <a:xfrm>
-            <a:off x="1223682" y="2703845"/>
-            <a:ext cx="4602350" cy="738664"/>
-          </a:xfrm>
-          <a:prstGeom prst="rect">
-            <a:avLst/>
-          </a:prstGeom>
-          <a:noFill/>
-        </p:spPr>
-        <p:txBody>
-          <a:bodyPr wrap="square">
-            <a:spAutoFit/>
-          </a:bodyPr>
-          <a:lstStyle/>
-          <a:p>
-            <a:r>
-              <a:rPr lang="pt-BR" sz="1400" dirty="0"/>
-              <a:t>Indicador da variação de uma nova medição dentro do que o modelo espera que aconteça. Ou seja, analisa modificações internas.</a:t>
-            </a:r>
-          </a:p>
-        </p:txBody>
-      </p:sp>
-      <p:sp>
-        <p:nvSpPr>
-          <p:cNvPr id="24" name="CaixaDeTexto 23">
-            <a:extLst>
-              <a:ext uri="{FF2B5EF4-FFF2-40B4-BE49-F238E27FC236}">
-                <a16:creationId xmlns:a16="http://schemas.microsoft.com/office/drawing/2014/main" id="{75F3F49D-86AF-460A-1806-7EC6969C702B}"/>
-              </a:ext>
-            </a:extLst>
-          </p:cNvPr>
-          <p:cNvSpPr txBox="1"/>
-          <p:nvPr/>
-        </p:nvSpPr>
-        <p:spPr>
-          <a:xfrm>
-            <a:off x="1234723" y="4419671"/>
-            <a:ext cx="4602350" cy="307777"/>
-          </a:xfrm>
-          <a:prstGeom prst="rect">
-            <a:avLst/>
-          </a:prstGeom>
-          <a:noFill/>
-        </p:spPr>
-        <p:txBody>
-          <a:bodyPr wrap="square">
-            <a:spAutoFit/>
-          </a:bodyPr>
-          <a:lstStyle/>
-          <a:p>
-            <a:r>
-              <a:rPr lang="pt-BR" sz="1400" dirty="0"/>
-              <a:t>O limite, sob hipótese nula de operação normal é:</a:t>
-            </a:r>
-          </a:p>
-        </p:txBody>
-      </p:sp>
       <p:pic>
         <p:nvPicPr>
-          <p:cNvPr id="26" name="Imagem 25">
-            <a:extLst>
-              <a:ext uri="{FF2B5EF4-FFF2-40B4-BE49-F238E27FC236}">
-                <a16:creationId xmlns:a16="http://schemas.microsoft.com/office/drawing/2014/main" id="{FFDEA4E1-F0D8-B510-7897-65B862433ABC}"/>
+          <p:cNvPr id="7" name="Imagem 6">
+            <a:extLst>
+              <a:ext uri="{FF2B5EF4-FFF2-40B4-BE49-F238E27FC236}">
+                <a16:creationId xmlns:a16="http://schemas.microsoft.com/office/drawing/2014/main" id="{256ECF8E-B940-8A15-3E9F-1D0345AA236F}"/>
               </a:ext>
             </a:extLst>
           </p:cNvPr>
@@ -5017,168 +5180,8 @@
         </p:blipFill>
         <p:spPr>
           <a:xfrm>
-            <a:off x="2455943" y="3732069"/>
-            <a:ext cx="1724231" cy="529129"/>
-          </a:xfrm>
-          <a:prstGeom prst="rect">
-            <a:avLst/>
-          </a:prstGeom>
-        </p:spPr>
-      </p:pic>
-      <p:pic>
-        <p:nvPicPr>
-          <p:cNvPr id="28" name="Imagem 27">
-            <a:extLst>
-              <a:ext uri="{FF2B5EF4-FFF2-40B4-BE49-F238E27FC236}">
-                <a16:creationId xmlns:a16="http://schemas.microsoft.com/office/drawing/2014/main" id="{E65EF6F4-136E-C86B-21FF-ED680B34FF73}"/>
-              </a:ext>
-            </a:extLst>
-          </p:cNvPr>
-          <p:cNvPicPr>
-            <a:picLocks noChangeAspect="1"/>
-          </p:cNvPicPr>
-          <p:nvPr/>
-        </p:nvPicPr>
-        <p:blipFill>
-          <a:blip r:embed="rId4"/>
-          <a:stretch>
-            <a:fillRect/>
-          </a:stretch>
-        </p:blipFill>
-        <p:spPr>
-          <a:xfrm>
-            <a:off x="1962539" y="5115619"/>
-            <a:ext cx="3124636" cy="800212"/>
-          </a:xfrm>
-          <a:prstGeom prst="rect">
-            <a:avLst/>
-          </a:prstGeom>
-        </p:spPr>
-      </p:pic>
-      <p:pic>
-        <p:nvPicPr>
-          <p:cNvPr id="30" name="Imagem 29">
-            <a:extLst>
-              <a:ext uri="{FF2B5EF4-FFF2-40B4-BE49-F238E27FC236}">
-                <a16:creationId xmlns:a16="http://schemas.microsoft.com/office/drawing/2014/main" id="{1FD01943-AD60-0C95-7504-993600FEA55E}"/>
-              </a:ext>
-            </a:extLst>
-          </p:cNvPr>
-          <p:cNvPicPr>
-            <a:picLocks noChangeAspect="1"/>
-          </p:cNvPicPr>
-          <p:nvPr/>
-        </p:nvPicPr>
-        <p:blipFill>
-          <a:blip r:embed="rId5"/>
-          <a:stretch>
-            <a:fillRect/>
-          </a:stretch>
-        </p:blipFill>
-        <p:spPr>
-          <a:xfrm>
-            <a:off x="7321997" y="3464236"/>
-            <a:ext cx="3362367" cy="490345"/>
-          </a:xfrm>
-          <a:prstGeom prst="rect">
-            <a:avLst/>
-          </a:prstGeom>
-        </p:spPr>
-      </p:pic>
-      <p:sp>
-        <p:nvSpPr>
-          <p:cNvPr id="31" name="CaixaDeTexto 30">
-            <a:extLst>
-              <a:ext uri="{FF2B5EF4-FFF2-40B4-BE49-F238E27FC236}">
-                <a16:creationId xmlns:a16="http://schemas.microsoft.com/office/drawing/2014/main" id="{AD0CC14C-D7A7-FB3B-6DCF-2003BF1B7A1D}"/>
-              </a:ext>
-            </a:extLst>
-          </p:cNvPr>
-          <p:cNvSpPr txBox="1"/>
-          <p:nvPr/>
-        </p:nvSpPr>
-        <p:spPr>
-          <a:xfrm>
-            <a:off x="6365970" y="2675997"/>
-            <a:ext cx="5236094" cy="523220"/>
-          </a:xfrm>
-          <a:prstGeom prst="rect">
-            <a:avLst/>
-          </a:prstGeom>
-          <a:noFill/>
-        </p:spPr>
-        <p:txBody>
-          <a:bodyPr wrap="square">
-            <a:spAutoFit/>
-          </a:bodyPr>
-          <a:lstStyle/>
-          <a:p>
-            <a:r>
-              <a:rPr lang="pt-BR" sz="1400" dirty="0"/>
-              <a:t>Mede o erro residual, ou seja, aquilo que o modelo não conseguiu explicar ou reconstruir.</a:t>
-            </a:r>
-          </a:p>
-        </p:txBody>
-      </p:sp>
-      <p:sp>
-        <p:nvSpPr>
-          <p:cNvPr id="32" name="CaixaDeTexto 31">
-            <a:extLst>
-              <a:ext uri="{FF2B5EF4-FFF2-40B4-BE49-F238E27FC236}">
-                <a16:creationId xmlns:a16="http://schemas.microsoft.com/office/drawing/2014/main" id="{47A7F5F9-7063-18B8-D4CE-F551D693EB6B}"/>
-              </a:ext>
-            </a:extLst>
-          </p:cNvPr>
-          <p:cNvSpPr txBox="1"/>
-          <p:nvPr/>
-        </p:nvSpPr>
-        <p:spPr>
-          <a:xfrm>
-            <a:off x="6365969" y="4339339"/>
-            <a:ext cx="5236094" cy="307777"/>
-          </a:xfrm>
-          <a:prstGeom prst="rect">
-            <a:avLst/>
-          </a:prstGeom>
-          <a:noFill/>
-        </p:spPr>
-        <p:txBody>
-          <a:bodyPr wrap="square">
-            <a:spAutoFit/>
-          </a:bodyPr>
-          <a:lstStyle/>
-          <a:p>
-            <a:r>
-              <a:rPr lang="pt-BR" sz="1400" dirty="0"/>
-              <a:t>Limite do resíduo, dentro do que é esperado por ele.</a:t>
-            </a:r>
-          </a:p>
-        </p:txBody>
-      </p:sp>
-      <p:pic>
-        <p:nvPicPr>
-          <p:cNvPr id="34" name="Imagem 33">
-            <a:extLst>
-              <a:ext uri="{FF2B5EF4-FFF2-40B4-BE49-F238E27FC236}">
-                <a16:creationId xmlns:a16="http://schemas.microsoft.com/office/drawing/2014/main" id="{3370E8B9-358D-3ECA-FA88-07C972C4DF76}"/>
-              </a:ext>
-            </a:extLst>
-          </p:cNvPr>
-          <p:cNvPicPr>
-            <a:picLocks noChangeAspect="1"/>
-          </p:cNvPicPr>
-          <p:nvPr/>
-        </p:nvPicPr>
-        <p:blipFill>
-          <a:blip r:embed="rId6"/>
-          <a:stretch>
-            <a:fillRect/>
-          </a:stretch>
-        </p:blipFill>
-        <p:spPr>
-          <a:xfrm>
-            <a:off x="6886827" y="4793881"/>
-            <a:ext cx="4194378" cy="1153817"/>
+            <a:off x="2130121" y="2274584"/>
+            <a:ext cx="8223247" cy="3158931"/>
           </a:xfrm>
           <a:prstGeom prst="rect">
             <a:avLst/>
@@ -5188,7 +5191,7 @@
     </p:spTree>
     <p:extLst>
       <p:ext uri="{BB962C8B-B14F-4D97-AF65-F5344CB8AC3E}">
-        <p14:creationId xmlns:p14="http://schemas.microsoft.com/office/powerpoint/2010/main" val="2362310258"/>
+        <p14:creationId xmlns:p14="http://schemas.microsoft.com/office/powerpoint/2010/main" val="3879583866"/>
       </p:ext>
     </p:extLst>
   </p:cSld>
@@ -5206,7 +5209,7 @@
         <p:cNvPr id="1" name="">
           <a:extLst>
             <a:ext uri="{FF2B5EF4-FFF2-40B4-BE49-F238E27FC236}">
-              <a16:creationId xmlns:a16="http://schemas.microsoft.com/office/drawing/2014/main" id="{5F992987-6349-4015-B3C7-235C87E3BB7E}"/>
+              <a16:creationId xmlns:a16="http://schemas.microsoft.com/office/drawing/2014/main" id="{88DD89E3-996B-D1A0-6368-F3A30DE795F0}"/>
             </a:ext>
           </a:extLst>
         </p:cNvPr>
@@ -5226,7 +5229,7 @@
           <p:cNvPr id="6" name="Conector reto 5">
             <a:extLst>
               <a:ext uri="{FF2B5EF4-FFF2-40B4-BE49-F238E27FC236}">
-                <a16:creationId xmlns:a16="http://schemas.microsoft.com/office/drawing/2014/main" id="{3C0E5BE8-D4E1-2D14-C89A-7C86074F4D22}"/>
+                <a16:creationId xmlns:a16="http://schemas.microsoft.com/office/drawing/2014/main" id="{A108D988-817A-29DE-DB7E-97EEEFA95E40}"/>
               </a:ext>
             </a:extLst>
           </p:cNvPr>
@@ -5265,7 +5268,7 @@
           <p:cNvPr id="12" name="CaixaDeTexto 11">
             <a:extLst>
               <a:ext uri="{FF2B5EF4-FFF2-40B4-BE49-F238E27FC236}">
-                <a16:creationId xmlns:a16="http://schemas.microsoft.com/office/drawing/2014/main" id="{3C222E33-A0B3-CBE8-3367-EE02D6E66D70}"/>
+                <a16:creationId xmlns:a16="http://schemas.microsoft.com/office/drawing/2014/main" id="{E95482D7-1DFA-A0C6-C172-7CAC279AE61B}"/>
               </a:ext>
             </a:extLst>
           </p:cNvPr>
@@ -5309,7 +5312,7 @@
           <p:cNvPr id="5" name="CaixaDeTexto 4">
             <a:extLst>
               <a:ext uri="{FF2B5EF4-FFF2-40B4-BE49-F238E27FC236}">
-                <a16:creationId xmlns:a16="http://schemas.microsoft.com/office/drawing/2014/main" id="{BC04B27C-955F-A438-8B9F-99D6C9BA1DB8}"/>
+                <a16:creationId xmlns:a16="http://schemas.microsoft.com/office/drawing/2014/main" id="{FC5A098D-3884-2A52-BE71-2627ADFC8F0B}"/>
               </a:ext>
             </a:extLst>
           </p:cNvPr>
@@ -5355,7 +5358,7 @@
           <p:cNvPr id="2" name="Título 1">
             <a:extLst>
               <a:ext uri="{FF2B5EF4-FFF2-40B4-BE49-F238E27FC236}">
-                <a16:creationId xmlns:a16="http://schemas.microsoft.com/office/drawing/2014/main" id="{C90CBF96-FD9D-FB60-9F1D-ADCD704F9559}"/>
+                <a16:creationId xmlns:a16="http://schemas.microsoft.com/office/drawing/2014/main" id="{8DD283F6-F63A-ECB3-1129-818CCB0B16E6}"/>
               </a:ext>
             </a:extLst>
           </p:cNvPr>
@@ -5429,7 +5432,7 @@
           <p:cNvPr id="3" name="Picture 2" descr="Logomarcas">
             <a:extLst>
               <a:ext uri="{FF2B5EF4-FFF2-40B4-BE49-F238E27FC236}">
-                <a16:creationId xmlns:a16="http://schemas.microsoft.com/office/drawing/2014/main" id="{45041160-6D50-CD04-72C4-7D925D35140B}"/>
+                <a16:creationId xmlns:a16="http://schemas.microsoft.com/office/drawing/2014/main" id="{2D67E504-A49A-4CA2-A023-4532D5FDC654}"/>
               </a:ext>
             </a:extLst>
           </p:cNvPr>
@@ -5476,7 +5479,7 @@
           <p:cNvPr id="4" name="Rectangle 1">
             <a:extLst>
               <a:ext uri="{FF2B5EF4-FFF2-40B4-BE49-F238E27FC236}">
-                <a16:creationId xmlns:a16="http://schemas.microsoft.com/office/drawing/2014/main" id="{7AB46DB3-4ADE-6D7A-1BB6-D51662B3C3A6}"/>
+                <a16:creationId xmlns:a16="http://schemas.microsoft.com/office/drawing/2014/main" id="{1AFFC0B9-25FD-9CBF-D0F1-CCAFBFB91368}"/>
               </a:ext>
             </a:extLst>
           </p:cNvPr>
@@ -5567,12 +5570,279 @@
           </a:p>
         </p:txBody>
       </p:sp>
+      <p:sp>
+        <p:nvSpPr>
+          <p:cNvPr id="10" name="CaixaDeTexto 9">
+            <a:extLst>
+              <a:ext uri="{FF2B5EF4-FFF2-40B4-BE49-F238E27FC236}">
+                <a16:creationId xmlns:a16="http://schemas.microsoft.com/office/drawing/2014/main" id="{E97D1930-3B33-1A3A-54E4-425340DE1910}"/>
+              </a:ext>
+            </a:extLst>
+          </p:cNvPr>
+          <p:cNvSpPr txBox="1"/>
+          <p:nvPr/>
+        </p:nvSpPr>
+        <p:spPr>
+          <a:xfrm>
+            <a:off x="1234723" y="2056526"/>
+            <a:ext cx="4421494" cy="338554"/>
+          </a:xfrm>
+          <a:prstGeom prst="rect">
+            <a:avLst/>
+          </a:prstGeom>
+          <a:noFill/>
+        </p:spPr>
+        <p:txBody>
+          <a:bodyPr wrap="square">
+            <a:spAutoFit/>
+          </a:bodyPr>
+          <a:lstStyle/>
+          <a:p>
+            <a:r>
+              <a:rPr lang="pt-BR" sz="1600" b="1" dirty="0"/>
+              <a:t>Estatística I² (Componentes Independentes)</a:t>
+            </a:r>
+            <a:endParaRPr lang="pt-BR" sz="1600" dirty="0"/>
+          </a:p>
+        </p:txBody>
+      </p:sp>
+      <p:cxnSp>
+        <p:nvCxnSpPr>
+          <p:cNvPr id="20" name="Conector reto 19">
+            <a:extLst>
+              <a:ext uri="{FF2B5EF4-FFF2-40B4-BE49-F238E27FC236}">
+                <a16:creationId xmlns:a16="http://schemas.microsoft.com/office/drawing/2014/main" id="{C8F58A67-88A4-36E8-616D-E5932F6CED68}"/>
+              </a:ext>
+            </a:extLst>
+          </p:cNvPr>
+          <p:cNvCxnSpPr>
+            <a:cxnSpLocks/>
+          </p:cNvCxnSpPr>
+          <p:nvPr/>
+        </p:nvCxnSpPr>
+        <p:spPr>
+          <a:xfrm>
+            <a:off x="6096000" y="1808874"/>
+            <a:ext cx="0" cy="4216698"/>
+          </a:xfrm>
+          <a:prstGeom prst="line">
+            <a:avLst/>
+          </a:prstGeom>
+        </p:spPr>
+        <p:style>
+          <a:lnRef idx="2">
+            <a:schemeClr val="accent1"/>
+          </a:lnRef>
+          <a:fillRef idx="0">
+            <a:schemeClr val="accent1"/>
+          </a:fillRef>
+          <a:effectRef idx="1">
+            <a:schemeClr val="accent1"/>
+          </a:effectRef>
+          <a:fontRef idx="minor">
+            <a:schemeClr val="tx1"/>
+          </a:fontRef>
+        </p:style>
+      </p:cxnSp>
+      <p:sp>
+        <p:nvSpPr>
+          <p:cNvPr id="21" name="CaixaDeTexto 20">
+            <a:extLst>
+              <a:ext uri="{FF2B5EF4-FFF2-40B4-BE49-F238E27FC236}">
+                <a16:creationId xmlns:a16="http://schemas.microsoft.com/office/drawing/2014/main" id="{6F15AF2F-193F-F424-94AA-115996946A4A}"/>
+              </a:ext>
+            </a:extLst>
+          </p:cNvPr>
+          <p:cNvSpPr txBox="1"/>
+          <p:nvPr/>
+        </p:nvSpPr>
+        <p:spPr>
+          <a:xfrm>
+            <a:off x="6250869" y="2056526"/>
+            <a:ext cx="5116063" cy="338554"/>
+          </a:xfrm>
+          <a:prstGeom prst="rect">
+            <a:avLst/>
+          </a:prstGeom>
+          <a:noFill/>
+        </p:spPr>
+        <p:txBody>
+          <a:bodyPr wrap="square">
+            <a:spAutoFit/>
+          </a:bodyPr>
+          <a:lstStyle/>
+          <a:p>
+            <a:r>
+              <a:rPr lang="pt-BR" sz="1600" b="1" dirty="0"/>
+              <a:t>Estatística D (índice Combinado)</a:t>
+            </a:r>
+            <a:endParaRPr lang="pt-BR" sz="1600" dirty="0"/>
+          </a:p>
+        </p:txBody>
+      </p:sp>
+      <p:sp>
+        <p:nvSpPr>
+          <p:cNvPr id="23" name="CaixaDeTexto 22">
+            <a:extLst>
+              <a:ext uri="{FF2B5EF4-FFF2-40B4-BE49-F238E27FC236}">
+                <a16:creationId xmlns:a16="http://schemas.microsoft.com/office/drawing/2014/main" id="{21F97BC4-E351-87FE-B203-AD97E0A3CCBB}"/>
+              </a:ext>
+            </a:extLst>
+          </p:cNvPr>
+          <p:cNvSpPr txBox="1"/>
+          <p:nvPr/>
+        </p:nvSpPr>
+        <p:spPr>
+          <a:xfrm>
+            <a:off x="1223681" y="2643662"/>
+            <a:ext cx="4602350" cy="1169551"/>
+          </a:xfrm>
+          <a:prstGeom prst="rect">
+            <a:avLst/>
+          </a:prstGeom>
+          <a:noFill/>
+        </p:spPr>
+        <p:txBody>
+          <a:bodyPr wrap="square">
+            <a:spAutoFit/>
+          </a:bodyPr>
+          <a:lstStyle/>
+          <a:p>
+            <a:r>
+              <a:rPr lang="pt-BR" sz="1400" dirty="0"/>
+              <a:t>Utilizada no contexto de Análise de Componentes Independentes (ICA). Equivale ao T², mas para processos que não são </a:t>
+            </a:r>
+            <a:r>
+              <a:rPr lang="pt-BR" sz="1400" b="1" dirty="0"/>
+              <a:t>gaussianos.</a:t>
+            </a:r>
+            <a:r>
+              <a:rPr lang="pt-BR" sz="1400" dirty="0"/>
+              <a:t> </a:t>
+            </a:r>
+          </a:p>
+          <a:p>
+            <a:endParaRPr lang="pt-BR" sz="1400" dirty="0"/>
+          </a:p>
+          <a:p>
+            <a:r>
+              <a:rPr lang="pt-BR" sz="1400" dirty="0"/>
+              <a:t>Mensura a variação no subespaço do modelo.</a:t>
+            </a:r>
+          </a:p>
+        </p:txBody>
+      </p:sp>
+      <p:sp>
+        <p:nvSpPr>
+          <p:cNvPr id="24" name="CaixaDeTexto 23">
+            <a:extLst>
+              <a:ext uri="{FF2B5EF4-FFF2-40B4-BE49-F238E27FC236}">
+                <a16:creationId xmlns:a16="http://schemas.microsoft.com/office/drawing/2014/main" id="{06F76F6C-4E41-C7A5-3CF8-A0E6488DC946}"/>
+              </a:ext>
+            </a:extLst>
+          </p:cNvPr>
+          <p:cNvSpPr txBox="1"/>
+          <p:nvPr/>
+        </p:nvSpPr>
+        <p:spPr>
+          <a:xfrm>
+            <a:off x="1234723" y="4718236"/>
+            <a:ext cx="4602350" cy="523220"/>
+          </a:xfrm>
+          <a:prstGeom prst="rect">
+            <a:avLst/>
+          </a:prstGeom>
+          <a:noFill/>
+        </p:spPr>
+        <p:txBody>
+          <a:bodyPr wrap="square">
+            <a:spAutoFit/>
+          </a:bodyPr>
+          <a:lstStyle/>
+          <a:p>
+            <a:r>
+              <a:rPr lang="pt-BR" sz="1400" dirty="0"/>
+              <a:t>Seu limite é dado por uma função quantil empírica obtida a partir dos dados de treinamento.</a:t>
+            </a:r>
+          </a:p>
+        </p:txBody>
+      </p:sp>
+      <p:sp>
+        <p:nvSpPr>
+          <p:cNvPr id="31" name="CaixaDeTexto 30">
+            <a:extLst>
+              <a:ext uri="{FF2B5EF4-FFF2-40B4-BE49-F238E27FC236}">
+                <a16:creationId xmlns:a16="http://schemas.microsoft.com/office/drawing/2014/main" id="{0CE11879-0E3D-6661-E506-1CBA25F7A85D}"/>
+              </a:ext>
+            </a:extLst>
+          </p:cNvPr>
+          <p:cNvSpPr txBox="1"/>
+          <p:nvPr/>
+        </p:nvSpPr>
+        <p:spPr>
+          <a:xfrm>
+            <a:off x="6265814" y="2625406"/>
+            <a:ext cx="5236094" cy="954107"/>
+          </a:xfrm>
+          <a:prstGeom prst="rect">
+            <a:avLst/>
+          </a:prstGeom>
+          <a:noFill/>
+        </p:spPr>
+        <p:txBody>
+          <a:bodyPr wrap="square">
+            <a:spAutoFit/>
+          </a:bodyPr>
+          <a:lstStyle/>
+          <a:p>
+            <a:r>
+              <a:rPr lang="pt-BR" sz="1400" dirty="0"/>
+              <a:t>Utilizada na Classificação supervisionada (FDA). A estatística D é utilizada com o treino de “normal” e “com falha”, classificando se se parece com um processo de falha de acordo com o histórico conhecido.</a:t>
+            </a:r>
+          </a:p>
+        </p:txBody>
+      </p:sp>
+      <p:sp>
+        <p:nvSpPr>
+          <p:cNvPr id="32" name="CaixaDeTexto 31">
+            <a:extLst>
+              <a:ext uri="{FF2B5EF4-FFF2-40B4-BE49-F238E27FC236}">
+                <a16:creationId xmlns:a16="http://schemas.microsoft.com/office/drawing/2014/main" id="{4AF322E4-A073-504B-AF48-1A6A6683ED65}"/>
+              </a:ext>
+            </a:extLst>
+          </p:cNvPr>
+          <p:cNvSpPr txBox="1"/>
+          <p:nvPr/>
+        </p:nvSpPr>
+        <p:spPr>
+          <a:xfrm>
+            <a:off x="6250869" y="4691265"/>
+            <a:ext cx="5236094" cy="307777"/>
+          </a:xfrm>
+          <a:prstGeom prst="rect">
+            <a:avLst/>
+          </a:prstGeom>
+          <a:noFill/>
+        </p:spPr>
+        <p:txBody>
+          <a:bodyPr wrap="square">
+            <a:spAutoFit/>
+          </a:bodyPr>
+          <a:lstStyle/>
+          <a:p>
+            <a:r>
+              <a:rPr lang="pt-BR" sz="1400" dirty="0"/>
+              <a:t>Seu limite é dado por uma distribuição Chi-quadrado</a:t>
+            </a:r>
+          </a:p>
+        </p:txBody>
+      </p:sp>
       <p:pic>
         <p:nvPicPr>
-          <p:cNvPr id="7" name="Imagem 6">
-            <a:extLst>
-              <a:ext uri="{FF2B5EF4-FFF2-40B4-BE49-F238E27FC236}">
-                <a16:creationId xmlns:a16="http://schemas.microsoft.com/office/drawing/2014/main" id="{256ECF8E-B940-8A15-3E9F-1D0345AA236F}"/>
+          <p:cNvPr id="8" name="Imagem 7">
+            <a:extLst>
+              <a:ext uri="{FF2B5EF4-FFF2-40B4-BE49-F238E27FC236}">
+                <a16:creationId xmlns:a16="http://schemas.microsoft.com/office/drawing/2014/main" id="{95A48935-F443-ECBA-82CD-813367A2DCE4}"/>
               </a:ext>
             </a:extLst>
           </p:cNvPr>
@@ -5589,8 +5859,128 @@
         </p:blipFill>
         <p:spPr>
           <a:xfrm>
-            <a:off x="2130121" y="2274584"/>
-            <a:ext cx="8223247" cy="3158931"/>
+            <a:off x="2630695" y="4066543"/>
+            <a:ext cx="1385248" cy="523220"/>
+          </a:xfrm>
+          <a:prstGeom prst="rect">
+            <a:avLst/>
+          </a:prstGeom>
+        </p:spPr>
+      </p:pic>
+      <p:pic>
+        <p:nvPicPr>
+          <p:cNvPr id="11" name="Imagem 10">
+            <a:extLst>
+              <a:ext uri="{FF2B5EF4-FFF2-40B4-BE49-F238E27FC236}">
+                <a16:creationId xmlns:a16="http://schemas.microsoft.com/office/drawing/2014/main" id="{89E27240-65A3-30A5-E6BC-2DE417718182}"/>
+              </a:ext>
+            </a:extLst>
+          </p:cNvPr>
+          <p:cNvPicPr>
+            <a:picLocks noChangeAspect="1"/>
+          </p:cNvPicPr>
+          <p:nvPr/>
+        </p:nvPicPr>
+        <p:blipFill>
+          <a:blip r:embed="rId4"/>
+          <a:stretch>
+            <a:fillRect/>
+          </a:stretch>
+        </p:blipFill>
+        <p:spPr>
+          <a:xfrm>
+            <a:off x="2490263" y="5399046"/>
+            <a:ext cx="1818507" cy="427509"/>
+          </a:xfrm>
+          <a:prstGeom prst="rect">
+            <a:avLst/>
+          </a:prstGeom>
+        </p:spPr>
+      </p:pic>
+      <p:pic>
+        <p:nvPicPr>
+          <p:cNvPr id="14" name="Imagem 13">
+            <a:extLst>
+              <a:ext uri="{FF2B5EF4-FFF2-40B4-BE49-F238E27FC236}">
+                <a16:creationId xmlns:a16="http://schemas.microsoft.com/office/drawing/2014/main" id="{6EA326AA-72DC-C791-CF35-F562EAA014EF}"/>
+              </a:ext>
+            </a:extLst>
+          </p:cNvPr>
+          <p:cNvPicPr>
+            <a:picLocks noChangeAspect="1"/>
+          </p:cNvPicPr>
+          <p:nvPr/>
+        </p:nvPicPr>
+        <p:blipFill>
+          <a:blip r:embed="rId5"/>
+          <a:stretch>
+            <a:fillRect/>
+          </a:stretch>
+        </p:blipFill>
+        <p:spPr>
+          <a:xfrm>
+            <a:off x="7933511" y="3793432"/>
+            <a:ext cx="1454989" cy="549052"/>
+          </a:xfrm>
+          <a:prstGeom prst="rect">
+            <a:avLst/>
+          </a:prstGeom>
+        </p:spPr>
+      </p:pic>
+      <p:pic>
+        <p:nvPicPr>
+          <p:cNvPr id="16" name="Imagem 15">
+            <a:extLst>
+              <a:ext uri="{FF2B5EF4-FFF2-40B4-BE49-F238E27FC236}">
+                <a16:creationId xmlns:a16="http://schemas.microsoft.com/office/drawing/2014/main" id="{80CB2B73-AC8F-F438-79F5-4C2CDEE781AF}"/>
+              </a:ext>
+            </a:extLst>
+          </p:cNvPr>
+          <p:cNvPicPr>
+            <a:picLocks noChangeAspect="1"/>
+          </p:cNvPicPr>
+          <p:nvPr/>
+        </p:nvPicPr>
+        <p:blipFill>
+          <a:blip r:embed="rId6"/>
+          <a:stretch>
+            <a:fillRect/>
+          </a:stretch>
+        </p:blipFill>
+        <p:spPr>
+          <a:xfrm>
+            <a:off x="7984280" y="5078854"/>
+            <a:ext cx="1581637" cy="400681"/>
+          </a:xfrm>
+          <a:prstGeom prst="rect">
+            <a:avLst/>
+          </a:prstGeom>
+        </p:spPr>
+      </p:pic>
+      <p:pic>
+        <p:nvPicPr>
+          <p:cNvPr id="18" name="Imagem 17">
+            <a:extLst>
+              <a:ext uri="{FF2B5EF4-FFF2-40B4-BE49-F238E27FC236}">
+                <a16:creationId xmlns:a16="http://schemas.microsoft.com/office/drawing/2014/main" id="{AB9568DD-8DD2-493D-DE82-8742A6DB613C}"/>
+              </a:ext>
+            </a:extLst>
+          </p:cNvPr>
+          <p:cNvPicPr>
+            <a:picLocks noChangeAspect="1"/>
+          </p:cNvPicPr>
+          <p:nvPr/>
+        </p:nvPicPr>
+        <p:blipFill>
+          <a:blip r:embed="rId7"/>
+          <a:stretch>
+            <a:fillRect/>
+          </a:stretch>
+        </p:blipFill>
+        <p:spPr>
+          <a:xfrm>
+            <a:off x="7752557" y="5514856"/>
+            <a:ext cx="1949180" cy="709334"/>
           </a:xfrm>
           <a:prstGeom prst="rect">
             <a:avLst/>
@@ -5600,7 +5990,7 @@
     </p:spTree>
     <p:extLst>
       <p:ext uri="{BB962C8B-B14F-4D97-AF65-F5344CB8AC3E}">
-        <p14:creationId xmlns:p14="http://schemas.microsoft.com/office/powerpoint/2010/main" val="3879583866"/>
+        <p14:creationId xmlns:p14="http://schemas.microsoft.com/office/powerpoint/2010/main" val="1812553422"/>
       </p:ext>
     </p:extLst>
   </p:cSld>
@@ -5618,7 +6008,7 @@
         <p:cNvPr id="1" name="">
           <a:extLst>
             <a:ext uri="{FF2B5EF4-FFF2-40B4-BE49-F238E27FC236}">
-              <a16:creationId xmlns:a16="http://schemas.microsoft.com/office/drawing/2014/main" id="{88DD89E3-996B-D1A0-6368-F3A30DE795F0}"/>
+              <a16:creationId xmlns:a16="http://schemas.microsoft.com/office/drawing/2014/main" id="{86FC116F-A426-4FED-2808-C8E57EC28250}"/>
             </a:ext>
           </a:extLst>
         </p:cNvPr>
@@ -5638,7 +6028,7 @@
           <p:cNvPr id="6" name="Conector reto 5">
             <a:extLst>
               <a:ext uri="{FF2B5EF4-FFF2-40B4-BE49-F238E27FC236}">
-                <a16:creationId xmlns:a16="http://schemas.microsoft.com/office/drawing/2014/main" id="{A108D988-817A-29DE-DB7E-97EEEFA95E40}"/>
+                <a16:creationId xmlns:a16="http://schemas.microsoft.com/office/drawing/2014/main" id="{F3977B54-861C-DAEC-49FD-4C570DE2A8DC}"/>
               </a:ext>
             </a:extLst>
           </p:cNvPr>
@@ -5677,7 +6067,7 @@
           <p:cNvPr id="12" name="CaixaDeTexto 11">
             <a:extLst>
               <a:ext uri="{FF2B5EF4-FFF2-40B4-BE49-F238E27FC236}">
-                <a16:creationId xmlns:a16="http://schemas.microsoft.com/office/drawing/2014/main" id="{E95482D7-1DFA-A0C6-C172-7CAC279AE61B}"/>
+                <a16:creationId xmlns:a16="http://schemas.microsoft.com/office/drawing/2014/main" id="{79E529BE-8597-A412-477D-1A4441D0755A}"/>
               </a:ext>
             </a:extLst>
           </p:cNvPr>
@@ -5721,7 +6111,7 @@
           <p:cNvPr id="5" name="CaixaDeTexto 4">
             <a:extLst>
               <a:ext uri="{FF2B5EF4-FFF2-40B4-BE49-F238E27FC236}">
-                <a16:creationId xmlns:a16="http://schemas.microsoft.com/office/drawing/2014/main" id="{FC5A098D-3884-2A52-BE71-2627ADFC8F0B}"/>
+                <a16:creationId xmlns:a16="http://schemas.microsoft.com/office/drawing/2014/main" id="{90BCF9D5-3721-409E-2B0C-DCCE40D7F838}"/>
               </a:ext>
             </a:extLst>
           </p:cNvPr>
@@ -5767,7 +6157,7 @@
           <p:cNvPr id="2" name="Título 1">
             <a:extLst>
               <a:ext uri="{FF2B5EF4-FFF2-40B4-BE49-F238E27FC236}">
-                <a16:creationId xmlns:a16="http://schemas.microsoft.com/office/drawing/2014/main" id="{8DD283F6-F63A-ECB3-1129-818CCB0B16E6}"/>
+                <a16:creationId xmlns:a16="http://schemas.microsoft.com/office/drawing/2014/main" id="{89BBE7E9-1502-C564-460B-9F9EEC90F6F0}"/>
               </a:ext>
             </a:extLst>
           </p:cNvPr>
@@ -5841,7 +6231,7 @@
           <p:cNvPr id="3" name="Picture 2" descr="Logomarcas">
             <a:extLst>
               <a:ext uri="{FF2B5EF4-FFF2-40B4-BE49-F238E27FC236}">
-                <a16:creationId xmlns:a16="http://schemas.microsoft.com/office/drawing/2014/main" id="{2D67E504-A49A-4CA2-A023-4532D5FDC654}"/>
+                <a16:creationId xmlns:a16="http://schemas.microsoft.com/office/drawing/2014/main" id="{EDB500F7-E669-7D51-6E80-A00D75F5ED30}"/>
               </a:ext>
             </a:extLst>
           </p:cNvPr>
@@ -5888,7 +6278,7 @@
           <p:cNvPr id="4" name="Rectangle 1">
             <a:extLst>
               <a:ext uri="{FF2B5EF4-FFF2-40B4-BE49-F238E27FC236}">
-                <a16:creationId xmlns:a16="http://schemas.microsoft.com/office/drawing/2014/main" id="{1AFFC0B9-25FD-9CBF-D0F1-CCAFBFB91368}"/>
+                <a16:creationId xmlns:a16="http://schemas.microsoft.com/office/drawing/2014/main" id="{0C14EEB8-9ABA-B794-0FC6-DE6FA2A3A238}"/>
               </a:ext>
             </a:extLst>
           </p:cNvPr>
@@ -5967,7 +6357,7 @@
                 <a:effectLst/>
                 <a:latin typeface="+mj-lt"/>
               </a:rPr>
-              <a:t>ESTATÍSTICAS UTILIZADAS</a:t>
+              <a:t>COEFICIENTES DE ANÁLISE</a:t>
             </a:r>
             <a:endParaRPr kumimoji="0" lang="pt-BR" altLang="pt-BR" sz="1600" u="none" strike="noStrike" cap="none" normalizeH="0" baseline="0" dirty="0">
               <a:ln>
@@ -5979,279 +6369,12 @@
           </a:p>
         </p:txBody>
       </p:sp>
-      <p:sp>
-        <p:nvSpPr>
-          <p:cNvPr id="10" name="CaixaDeTexto 9">
-            <a:extLst>
-              <a:ext uri="{FF2B5EF4-FFF2-40B4-BE49-F238E27FC236}">
-                <a16:creationId xmlns:a16="http://schemas.microsoft.com/office/drawing/2014/main" id="{E97D1930-3B33-1A3A-54E4-425340DE1910}"/>
-              </a:ext>
-            </a:extLst>
-          </p:cNvPr>
-          <p:cNvSpPr txBox="1"/>
-          <p:nvPr/>
-        </p:nvSpPr>
-        <p:spPr>
-          <a:xfrm>
-            <a:off x="1234723" y="2056526"/>
-            <a:ext cx="4421494" cy="338554"/>
-          </a:xfrm>
-          <a:prstGeom prst="rect">
-            <a:avLst/>
-          </a:prstGeom>
-          <a:noFill/>
-        </p:spPr>
-        <p:txBody>
-          <a:bodyPr wrap="square">
-            <a:spAutoFit/>
-          </a:bodyPr>
-          <a:lstStyle/>
-          <a:p>
-            <a:r>
-              <a:rPr lang="pt-BR" sz="1600" b="1" dirty="0"/>
-              <a:t>Estatística I² (Componentes Independentes)</a:t>
-            </a:r>
-            <a:endParaRPr lang="pt-BR" sz="1600" dirty="0"/>
-          </a:p>
-        </p:txBody>
-      </p:sp>
-      <p:cxnSp>
-        <p:nvCxnSpPr>
-          <p:cNvPr id="20" name="Conector reto 19">
-            <a:extLst>
-              <a:ext uri="{FF2B5EF4-FFF2-40B4-BE49-F238E27FC236}">
-                <a16:creationId xmlns:a16="http://schemas.microsoft.com/office/drawing/2014/main" id="{C8F58A67-88A4-36E8-616D-E5932F6CED68}"/>
-              </a:ext>
-            </a:extLst>
-          </p:cNvPr>
-          <p:cNvCxnSpPr>
-            <a:cxnSpLocks/>
-          </p:cNvCxnSpPr>
-          <p:nvPr/>
-        </p:nvCxnSpPr>
-        <p:spPr>
-          <a:xfrm>
-            <a:off x="6096000" y="1808874"/>
-            <a:ext cx="0" cy="4216698"/>
-          </a:xfrm>
-          <a:prstGeom prst="line">
-            <a:avLst/>
-          </a:prstGeom>
-        </p:spPr>
-        <p:style>
-          <a:lnRef idx="2">
-            <a:schemeClr val="accent1"/>
-          </a:lnRef>
-          <a:fillRef idx="0">
-            <a:schemeClr val="accent1"/>
-          </a:fillRef>
-          <a:effectRef idx="1">
-            <a:schemeClr val="accent1"/>
-          </a:effectRef>
-          <a:fontRef idx="minor">
-            <a:schemeClr val="tx1"/>
-          </a:fontRef>
-        </p:style>
-      </p:cxnSp>
-      <p:sp>
-        <p:nvSpPr>
-          <p:cNvPr id="21" name="CaixaDeTexto 20">
-            <a:extLst>
-              <a:ext uri="{FF2B5EF4-FFF2-40B4-BE49-F238E27FC236}">
-                <a16:creationId xmlns:a16="http://schemas.microsoft.com/office/drawing/2014/main" id="{6F15AF2F-193F-F424-94AA-115996946A4A}"/>
-              </a:ext>
-            </a:extLst>
-          </p:cNvPr>
-          <p:cNvSpPr txBox="1"/>
-          <p:nvPr/>
-        </p:nvSpPr>
-        <p:spPr>
-          <a:xfrm>
-            <a:off x="6250869" y="2056526"/>
-            <a:ext cx="5116063" cy="338554"/>
-          </a:xfrm>
-          <a:prstGeom prst="rect">
-            <a:avLst/>
-          </a:prstGeom>
-          <a:noFill/>
-        </p:spPr>
-        <p:txBody>
-          <a:bodyPr wrap="square">
-            <a:spAutoFit/>
-          </a:bodyPr>
-          <a:lstStyle/>
-          <a:p>
-            <a:r>
-              <a:rPr lang="pt-BR" sz="1600" b="1" dirty="0"/>
-              <a:t>Estatística D (índice Combinado)</a:t>
-            </a:r>
-            <a:endParaRPr lang="pt-BR" sz="1600" dirty="0"/>
-          </a:p>
-        </p:txBody>
-      </p:sp>
-      <p:sp>
-        <p:nvSpPr>
-          <p:cNvPr id="23" name="CaixaDeTexto 22">
-            <a:extLst>
-              <a:ext uri="{FF2B5EF4-FFF2-40B4-BE49-F238E27FC236}">
-                <a16:creationId xmlns:a16="http://schemas.microsoft.com/office/drawing/2014/main" id="{21F97BC4-E351-87FE-B203-AD97E0A3CCBB}"/>
-              </a:ext>
-            </a:extLst>
-          </p:cNvPr>
-          <p:cNvSpPr txBox="1"/>
-          <p:nvPr/>
-        </p:nvSpPr>
-        <p:spPr>
-          <a:xfrm>
-            <a:off x="1223681" y="2643662"/>
-            <a:ext cx="4602350" cy="1169551"/>
-          </a:xfrm>
-          <a:prstGeom prst="rect">
-            <a:avLst/>
-          </a:prstGeom>
-          <a:noFill/>
-        </p:spPr>
-        <p:txBody>
-          <a:bodyPr wrap="square">
-            <a:spAutoFit/>
-          </a:bodyPr>
-          <a:lstStyle/>
-          <a:p>
-            <a:r>
-              <a:rPr lang="pt-BR" sz="1400" dirty="0"/>
-              <a:t>Utilizada no contexto de Análise de Componentes Independentes (ICA). Equivale ao T², mas para processos que não são </a:t>
-            </a:r>
-            <a:r>
-              <a:rPr lang="pt-BR" sz="1400" b="1" dirty="0"/>
-              <a:t>gaussianos.</a:t>
-            </a:r>
-            <a:r>
-              <a:rPr lang="pt-BR" sz="1400" dirty="0"/>
-              <a:t> </a:t>
-            </a:r>
-          </a:p>
-          <a:p>
-            <a:endParaRPr lang="pt-BR" sz="1400" dirty="0"/>
-          </a:p>
-          <a:p>
-            <a:r>
-              <a:rPr lang="pt-BR" sz="1400" dirty="0"/>
-              <a:t>Mensura a variação no subespaço do modelo.</a:t>
-            </a:r>
-          </a:p>
-        </p:txBody>
-      </p:sp>
-      <p:sp>
-        <p:nvSpPr>
-          <p:cNvPr id="24" name="CaixaDeTexto 23">
-            <a:extLst>
-              <a:ext uri="{FF2B5EF4-FFF2-40B4-BE49-F238E27FC236}">
-                <a16:creationId xmlns:a16="http://schemas.microsoft.com/office/drawing/2014/main" id="{06F76F6C-4E41-C7A5-3CF8-A0E6488DC946}"/>
-              </a:ext>
-            </a:extLst>
-          </p:cNvPr>
-          <p:cNvSpPr txBox="1"/>
-          <p:nvPr/>
-        </p:nvSpPr>
-        <p:spPr>
-          <a:xfrm>
-            <a:off x="1234723" y="4718236"/>
-            <a:ext cx="4602350" cy="523220"/>
-          </a:xfrm>
-          <a:prstGeom prst="rect">
-            <a:avLst/>
-          </a:prstGeom>
-          <a:noFill/>
-        </p:spPr>
-        <p:txBody>
-          <a:bodyPr wrap="square">
-            <a:spAutoFit/>
-          </a:bodyPr>
-          <a:lstStyle/>
-          <a:p>
-            <a:r>
-              <a:rPr lang="pt-BR" sz="1400" dirty="0"/>
-              <a:t>Seu limite é dado por uma função quantil empírica obtida a partir dos dados de treinamento.</a:t>
-            </a:r>
-          </a:p>
-        </p:txBody>
-      </p:sp>
-      <p:sp>
-        <p:nvSpPr>
-          <p:cNvPr id="31" name="CaixaDeTexto 30">
-            <a:extLst>
-              <a:ext uri="{FF2B5EF4-FFF2-40B4-BE49-F238E27FC236}">
-                <a16:creationId xmlns:a16="http://schemas.microsoft.com/office/drawing/2014/main" id="{0CE11879-0E3D-6661-E506-1CBA25F7A85D}"/>
-              </a:ext>
-            </a:extLst>
-          </p:cNvPr>
-          <p:cNvSpPr txBox="1"/>
-          <p:nvPr/>
-        </p:nvSpPr>
-        <p:spPr>
-          <a:xfrm>
-            <a:off x="6265814" y="2625406"/>
-            <a:ext cx="5236094" cy="954107"/>
-          </a:xfrm>
-          <a:prstGeom prst="rect">
-            <a:avLst/>
-          </a:prstGeom>
-          <a:noFill/>
-        </p:spPr>
-        <p:txBody>
-          <a:bodyPr wrap="square">
-            <a:spAutoFit/>
-          </a:bodyPr>
-          <a:lstStyle/>
-          <a:p>
-            <a:r>
-              <a:rPr lang="pt-BR" sz="1400" dirty="0"/>
-              <a:t>Utilizada na Classificação supervisionada (FDA). A estatística D é utilizada com o treino de “normal” e “com falha”, classificando se se parece com um processo de falha de acordo com o histórico conhecido.</a:t>
-            </a:r>
-          </a:p>
-        </p:txBody>
-      </p:sp>
-      <p:sp>
-        <p:nvSpPr>
-          <p:cNvPr id="32" name="CaixaDeTexto 31">
-            <a:extLst>
-              <a:ext uri="{FF2B5EF4-FFF2-40B4-BE49-F238E27FC236}">
-                <a16:creationId xmlns:a16="http://schemas.microsoft.com/office/drawing/2014/main" id="{4AF322E4-A073-504B-AF48-1A6A6683ED65}"/>
-              </a:ext>
-            </a:extLst>
-          </p:cNvPr>
-          <p:cNvSpPr txBox="1"/>
-          <p:nvPr/>
-        </p:nvSpPr>
-        <p:spPr>
-          <a:xfrm>
-            <a:off x="6250869" y="4691265"/>
-            <a:ext cx="5236094" cy="307777"/>
-          </a:xfrm>
-          <a:prstGeom prst="rect">
-            <a:avLst/>
-          </a:prstGeom>
-          <a:noFill/>
-        </p:spPr>
-        <p:txBody>
-          <a:bodyPr wrap="square">
-            <a:spAutoFit/>
-          </a:bodyPr>
-          <a:lstStyle/>
-          <a:p>
-            <a:r>
-              <a:rPr lang="pt-BR" sz="1400" dirty="0"/>
-              <a:t>Seu limite é dado por uma distribuição Chi-quadrado</a:t>
-            </a:r>
-          </a:p>
-        </p:txBody>
-      </p:sp>
       <p:pic>
         <p:nvPicPr>
-          <p:cNvPr id="8" name="Imagem 7">
-            <a:extLst>
-              <a:ext uri="{FF2B5EF4-FFF2-40B4-BE49-F238E27FC236}">
-                <a16:creationId xmlns:a16="http://schemas.microsoft.com/office/drawing/2014/main" id="{95A48935-F443-ECBA-82CD-813367A2DCE4}"/>
+          <p:cNvPr id="24" name="Imagem 23" descr="Introdução a Métricas de Perfomance em Classificação | by Gustavo Candido |  Medium">
+            <a:extLst>
+              <a:ext uri="{FF2B5EF4-FFF2-40B4-BE49-F238E27FC236}">
+                <a16:creationId xmlns:a16="http://schemas.microsoft.com/office/drawing/2014/main" id="{D5BA5570-0B41-544D-928B-CA3624A3F84A}"/>
               </a:ext>
             </a:extLst>
           </p:cNvPr>
@@ -6262,134 +6385,15 @@
         </p:nvPicPr>
         <p:blipFill>
           <a:blip r:embed="rId3"/>
+          <a:srcRect t="21885" b="22766"/>
           <a:stretch>
             <a:fillRect/>
           </a:stretch>
         </p:blipFill>
         <p:spPr>
           <a:xfrm>
-            <a:off x="2630695" y="4066543"/>
-            <a:ext cx="1385248" cy="523220"/>
-          </a:xfrm>
-          <a:prstGeom prst="rect">
-            <a:avLst/>
-          </a:prstGeom>
-        </p:spPr>
-      </p:pic>
-      <p:pic>
-        <p:nvPicPr>
-          <p:cNvPr id="11" name="Imagem 10">
-            <a:extLst>
-              <a:ext uri="{FF2B5EF4-FFF2-40B4-BE49-F238E27FC236}">
-                <a16:creationId xmlns:a16="http://schemas.microsoft.com/office/drawing/2014/main" id="{89E27240-65A3-30A5-E6BC-2DE417718182}"/>
-              </a:ext>
-            </a:extLst>
-          </p:cNvPr>
-          <p:cNvPicPr>
-            <a:picLocks noChangeAspect="1"/>
-          </p:cNvPicPr>
-          <p:nvPr/>
-        </p:nvPicPr>
-        <p:blipFill>
-          <a:blip r:embed="rId4"/>
-          <a:stretch>
-            <a:fillRect/>
-          </a:stretch>
-        </p:blipFill>
-        <p:spPr>
-          <a:xfrm>
-            <a:off x="2490263" y="5399046"/>
-            <a:ext cx="1818507" cy="427509"/>
-          </a:xfrm>
-          <a:prstGeom prst="rect">
-            <a:avLst/>
-          </a:prstGeom>
-        </p:spPr>
-      </p:pic>
-      <p:pic>
-        <p:nvPicPr>
-          <p:cNvPr id="14" name="Imagem 13">
-            <a:extLst>
-              <a:ext uri="{FF2B5EF4-FFF2-40B4-BE49-F238E27FC236}">
-                <a16:creationId xmlns:a16="http://schemas.microsoft.com/office/drawing/2014/main" id="{6EA326AA-72DC-C791-CF35-F562EAA014EF}"/>
-              </a:ext>
-            </a:extLst>
-          </p:cNvPr>
-          <p:cNvPicPr>
-            <a:picLocks noChangeAspect="1"/>
-          </p:cNvPicPr>
-          <p:nvPr/>
-        </p:nvPicPr>
-        <p:blipFill>
-          <a:blip r:embed="rId5"/>
-          <a:stretch>
-            <a:fillRect/>
-          </a:stretch>
-        </p:blipFill>
-        <p:spPr>
-          <a:xfrm>
-            <a:off x="7933511" y="3793432"/>
-            <a:ext cx="1454989" cy="549052"/>
-          </a:xfrm>
-          <a:prstGeom prst="rect">
-            <a:avLst/>
-          </a:prstGeom>
-        </p:spPr>
-      </p:pic>
-      <p:pic>
-        <p:nvPicPr>
-          <p:cNvPr id="16" name="Imagem 15">
-            <a:extLst>
-              <a:ext uri="{FF2B5EF4-FFF2-40B4-BE49-F238E27FC236}">
-                <a16:creationId xmlns:a16="http://schemas.microsoft.com/office/drawing/2014/main" id="{80CB2B73-AC8F-F438-79F5-4C2CDEE781AF}"/>
-              </a:ext>
-            </a:extLst>
-          </p:cNvPr>
-          <p:cNvPicPr>
-            <a:picLocks noChangeAspect="1"/>
-          </p:cNvPicPr>
-          <p:nvPr/>
-        </p:nvPicPr>
-        <p:blipFill>
-          <a:blip r:embed="rId6"/>
-          <a:stretch>
-            <a:fillRect/>
-          </a:stretch>
-        </p:blipFill>
-        <p:spPr>
-          <a:xfrm>
-            <a:off x="7984280" y="5078854"/>
-            <a:ext cx="1581637" cy="400681"/>
-          </a:xfrm>
-          <a:prstGeom prst="rect">
-            <a:avLst/>
-          </a:prstGeom>
-        </p:spPr>
-      </p:pic>
-      <p:pic>
-        <p:nvPicPr>
-          <p:cNvPr id="18" name="Imagem 17">
-            <a:extLst>
-              <a:ext uri="{FF2B5EF4-FFF2-40B4-BE49-F238E27FC236}">
-                <a16:creationId xmlns:a16="http://schemas.microsoft.com/office/drawing/2014/main" id="{AB9568DD-8DD2-493D-DE82-8742A6DB613C}"/>
-              </a:ext>
-            </a:extLst>
-          </p:cNvPr>
-          <p:cNvPicPr>
-            <a:picLocks noChangeAspect="1"/>
-          </p:cNvPicPr>
-          <p:nvPr/>
-        </p:nvPicPr>
-        <p:blipFill>
-          <a:blip r:embed="rId7"/>
-          <a:stretch>
-            <a:fillRect/>
-          </a:stretch>
-        </p:blipFill>
-        <p:spPr>
-          <a:xfrm>
-            <a:off x="7752557" y="5514856"/>
-            <a:ext cx="1949180" cy="709334"/>
+            <a:off x="1721305" y="2470610"/>
+            <a:ext cx="8134440" cy="2858945"/>
           </a:xfrm>
           <a:prstGeom prst="rect">
             <a:avLst/>
@@ -6399,7 +6403,7 @@
     </p:spTree>
     <p:extLst>
       <p:ext uri="{BB962C8B-B14F-4D97-AF65-F5344CB8AC3E}">
-        <p14:creationId xmlns:p14="http://schemas.microsoft.com/office/powerpoint/2010/main" val="1812553422"/>
+        <p14:creationId xmlns:p14="http://schemas.microsoft.com/office/powerpoint/2010/main" val="1263781275"/>
       </p:ext>
     </p:extLst>
   </p:cSld>
@@ -6417,7 +6421,7 @@
         <p:cNvPr id="1" name="">
           <a:extLst>
             <a:ext uri="{FF2B5EF4-FFF2-40B4-BE49-F238E27FC236}">
-              <a16:creationId xmlns:a16="http://schemas.microsoft.com/office/drawing/2014/main" id="{86FC116F-A426-4FED-2808-C8E57EC28250}"/>
+              <a16:creationId xmlns:a16="http://schemas.microsoft.com/office/drawing/2014/main" id="{0DC83ABE-60C9-1C3D-25E6-68F1F88EE47B}"/>
             </a:ext>
           </a:extLst>
         </p:cNvPr>
@@ -6437,7 +6441,7 @@
           <p:cNvPr id="6" name="Conector reto 5">
             <a:extLst>
               <a:ext uri="{FF2B5EF4-FFF2-40B4-BE49-F238E27FC236}">
-                <a16:creationId xmlns:a16="http://schemas.microsoft.com/office/drawing/2014/main" id="{F3977B54-861C-DAEC-49FD-4C570DE2A8DC}"/>
+                <a16:creationId xmlns:a16="http://schemas.microsoft.com/office/drawing/2014/main" id="{8E275308-E766-AF13-60C0-09653A0F99FE}"/>
               </a:ext>
             </a:extLst>
           </p:cNvPr>
@@ -6476,7 +6480,7 @@
           <p:cNvPr id="12" name="CaixaDeTexto 11">
             <a:extLst>
               <a:ext uri="{FF2B5EF4-FFF2-40B4-BE49-F238E27FC236}">
-                <a16:creationId xmlns:a16="http://schemas.microsoft.com/office/drawing/2014/main" id="{79E529BE-8597-A412-477D-1A4441D0755A}"/>
+                <a16:creationId xmlns:a16="http://schemas.microsoft.com/office/drawing/2014/main" id="{9A145AA1-1CFA-866C-331B-132A002E6588}"/>
               </a:ext>
             </a:extLst>
           </p:cNvPr>
@@ -6520,7 +6524,7 @@
           <p:cNvPr id="5" name="CaixaDeTexto 4">
             <a:extLst>
               <a:ext uri="{FF2B5EF4-FFF2-40B4-BE49-F238E27FC236}">
-                <a16:creationId xmlns:a16="http://schemas.microsoft.com/office/drawing/2014/main" id="{90BCF9D5-3721-409E-2B0C-DCCE40D7F838}"/>
+                <a16:creationId xmlns:a16="http://schemas.microsoft.com/office/drawing/2014/main" id="{4590BDEF-D75E-8353-ABDB-94E127DA3B94}"/>
               </a:ext>
             </a:extLst>
           </p:cNvPr>
@@ -6566,7 +6570,7 @@
           <p:cNvPr id="2" name="Título 1">
             <a:extLst>
               <a:ext uri="{FF2B5EF4-FFF2-40B4-BE49-F238E27FC236}">
-                <a16:creationId xmlns:a16="http://schemas.microsoft.com/office/drawing/2014/main" id="{89BBE7E9-1502-C564-460B-9F9EEC90F6F0}"/>
+                <a16:creationId xmlns:a16="http://schemas.microsoft.com/office/drawing/2014/main" id="{D721270B-AC96-C2A4-2317-0196F6579F2D}"/>
               </a:ext>
             </a:extLst>
           </p:cNvPr>
@@ -6640,7 +6644,7 @@
           <p:cNvPr id="3" name="Picture 2" descr="Logomarcas">
             <a:extLst>
               <a:ext uri="{FF2B5EF4-FFF2-40B4-BE49-F238E27FC236}">
-                <a16:creationId xmlns:a16="http://schemas.microsoft.com/office/drawing/2014/main" id="{EDB500F7-E669-7D51-6E80-A00D75F5ED30}"/>
+                <a16:creationId xmlns:a16="http://schemas.microsoft.com/office/drawing/2014/main" id="{562D30C0-2362-5522-83FE-5C9D4F8ACD77}"/>
               </a:ext>
             </a:extLst>
           </p:cNvPr>
@@ -6687,7 +6691,7 @@
           <p:cNvPr id="4" name="Rectangle 1">
             <a:extLst>
               <a:ext uri="{FF2B5EF4-FFF2-40B4-BE49-F238E27FC236}">
-                <a16:creationId xmlns:a16="http://schemas.microsoft.com/office/drawing/2014/main" id="{0C14EEB8-9ABA-B794-0FC6-DE6FA2A3A238}"/>
+                <a16:creationId xmlns:a16="http://schemas.microsoft.com/office/drawing/2014/main" id="{FC3B93CA-B910-912F-FE0F-123449D8ECC0}"/>
               </a:ext>
             </a:extLst>
           </p:cNvPr>
@@ -6778,172 +6782,22 @@
           </a:p>
         </p:txBody>
       </p:sp>
-      <p:pic>
-        <p:nvPicPr>
-          <p:cNvPr id="24" name="Imagem 23" descr="Introdução a Métricas de Perfomance em Classificação | by Gustavo Candido |  Medium">
-            <a:extLst>
-              <a:ext uri="{FF2B5EF4-FFF2-40B4-BE49-F238E27FC236}">
-                <a16:creationId xmlns:a16="http://schemas.microsoft.com/office/drawing/2014/main" id="{D5BA5570-0B41-544D-928B-CA3624A3F84A}"/>
-              </a:ext>
-            </a:extLst>
-          </p:cNvPr>
-          <p:cNvPicPr>
-            <a:picLocks noChangeAspect="1"/>
-          </p:cNvPicPr>
-          <p:nvPr/>
-        </p:nvPicPr>
-        <p:blipFill>
-          <a:blip r:embed="rId3"/>
-          <a:srcRect t="21885" b="22766"/>
-          <a:stretch>
-            <a:fillRect/>
-          </a:stretch>
-        </p:blipFill>
+      <p:sp>
+        <p:nvSpPr>
+          <p:cNvPr id="8" name="CaixaDeTexto 7">
+            <a:extLst>
+              <a:ext uri="{FF2B5EF4-FFF2-40B4-BE49-F238E27FC236}">
+                <a16:creationId xmlns:a16="http://schemas.microsoft.com/office/drawing/2014/main" id="{8C3B7273-E210-7997-9C33-B583B7D80EA7}"/>
+              </a:ext>
+            </a:extLst>
+          </p:cNvPr>
+          <p:cNvSpPr txBox="1"/>
+          <p:nvPr/>
+        </p:nvSpPr>
         <p:spPr>
           <a:xfrm>
-            <a:off x="1721305" y="2470610"/>
-            <a:ext cx="8134440" cy="2858945"/>
-          </a:xfrm>
-          <a:prstGeom prst="rect">
-            <a:avLst/>
-          </a:prstGeom>
-        </p:spPr>
-      </p:pic>
-    </p:spTree>
-    <p:extLst>
-      <p:ext uri="{BB962C8B-B14F-4D97-AF65-F5344CB8AC3E}">
-        <p14:creationId xmlns:p14="http://schemas.microsoft.com/office/powerpoint/2010/main" val="1263781275"/>
-      </p:ext>
-    </p:extLst>
-  </p:cSld>
-  <p:clrMapOvr>
-    <a:masterClrMapping/>
-  </p:clrMapOvr>
-</p:sld>
-</file>
-
-<file path=ppt/slides/slide15.xml><?xml version="1.0" encoding="utf-8"?>
-<p:sld xmlns:a="http://schemas.openxmlformats.org/drawingml/2006/main" xmlns:r="http://schemas.openxmlformats.org/officeDocument/2006/relationships" xmlns:p="http://schemas.openxmlformats.org/presentationml/2006/main">
-  <p:cSld>
-    <p:spTree>
-      <p:nvGrpSpPr>
-        <p:cNvPr id="1" name="">
-          <a:extLst>
-            <a:ext uri="{FF2B5EF4-FFF2-40B4-BE49-F238E27FC236}">
-              <a16:creationId xmlns:a16="http://schemas.microsoft.com/office/drawing/2014/main" id="{0DC83ABE-60C9-1C3D-25E6-68F1F88EE47B}"/>
-            </a:ext>
-          </a:extLst>
-        </p:cNvPr>
-        <p:cNvGrpSpPr/>
-        <p:nvPr/>
-      </p:nvGrpSpPr>
-      <p:grpSpPr>
-        <a:xfrm>
-          <a:off x="0" y="0"/>
-          <a:ext cx="0" cy="0"/>
-          <a:chOff x="0" y="0"/>
-          <a:chExt cx="0" cy="0"/>
-        </a:xfrm>
-      </p:grpSpPr>
-      <p:cxnSp>
-        <p:nvCxnSpPr>
-          <p:cNvPr id="6" name="Conector reto 5">
-            <a:extLst>
-              <a:ext uri="{FF2B5EF4-FFF2-40B4-BE49-F238E27FC236}">
-                <a16:creationId xmlns:a16="http://schemas.microsoft.com/office/drawing/2014/main" id="{8E275308-E766-AF13-60C0-09653A0F99FE}"/>
-              </a:ext>
-            </a:extLst>
-          </p:cNvPr>
-          <p:cNvCxnSpPr>
-            <a:cxnSpLocks/>
-          </p:cNvCxnSpPr>
-          <p:nvPr/>
-        </p:nvCxnSpPr>
-        <p:spPr>
-          <a:xfrm>
-            <a:off x="1223682" y="1342275"/>
-            <a:ext cx="9129686" cy="0"/>
-          </a:xfrm>
-          <a:prstGeom prst="line">
-            <a:avLst/>
-          </a:prstGeom>
-          <a:ln/>
-        </p:spPr>
-        <p:style>
-          <a:lnRef idx="3">
-            <a:schemeClr val="accent3"/>
-          </a:lnRef>
-          <a:fillRef idx="0">
-            <a:schemeClr val="accent3"/>
-          </a:fillRef>
-          <a:effectRef idx="2">
-            <a:schemeClr val="accent3"/>
-          </a:effectRef>
-          <a:fontRef idx="minor">
-            <a:schemeClr val="tx1"/>
-          </a:fontRef>
-        </p:style>
-      </p:cxnSp>
-      <p:sp>
-        <p:nvSpPr>
-          <p:cNvPr id="12" name="CaixaDeTexto 11">
-            <a:extLst>
-              <a:ext uri="{FF2B5EF4-FFF2-40B4-BE49-F238E27FC236}">
-                <a16:creationId xmlns:a16="http://schemas.microsoft.com/office/drawing/2014/main" id="{9A145AA1-1CFA-866C-331B-132A002E6588}"/>
-              </a:ext>
-            </a:extLst>
-          </p:cNvPr>
-          <p:cNvSpPr txBox="1"/>
-          <p:nvPr/>
-        </p:nvSpPr>
-        <p:spPr>
-          <a:xfrm>
-            <a:off x="1223682" y="887884"/>
-            <a:ext cx="6170176" cy="707886"/>
-          </a:xfrm>
-          <a:prstGeom prst="rect">
-            <a:avLst/>
-          </a:prstGeom>
-          <a:noFill/>
-        </p:spPr>
-        <p:txBody>
-          <a:bodyPr wrap="square" rtlCol="0">
-            <a:spAutoFit/>
-          </a:bodyPr>
-          <a:lstStyle/>
-          <a:p>
-            <a:r>
-              <a:rPr lang="pt-BR" sz="2000" b="1" dirty="0">
-                <a:latin typeface="Arial" panose="020B0604020202020204" pitchFamily="34" charset="0"/>
-                <a:cs typeface="Arial" panose="020B0604020202020204" pitchFamily="34" charset="0"/>
-              </a:rPr>
-              <a:t>2. METODOLOGIA DE TESTES</a:t>
-            </a:r>
-          </a:p>
-          <a:p>
-            <a:endParaRPr lang="pt-BR" sz="2000" b="1" dirty="0">
-              <a:latin typeface="Arial" panose="020B0604020202020204" pitchFamily="34" charset="0"/>
-              <a:cs typeface="Arial" panose="020B0604020202020204" pitchFamily="34" charset="0"/>
-            </a:endParaRPr>
-          </a:p>
-        </p:txBody>
-      </p:sp>
-      <p:sp>
-        <p:nvSpPr>
-          <p:cNvPr id="5" name="CaixaDeTexto 4">
-            <a:extLst>
-              <a:ext uri="{FF2B5EF4-FFF2-40B4-BE49-F238E27FC236}">
-                <a16:creationId xmlns:a16="http://schemas.microsoft.com/office/drawing/2014/main" id="{4590BDEF-D75E-8353-ABDB-94E127DA3B94}"/>
-              </a:ext>
-            </a:extLst>
-          </p:cNvPr>
-          <p:cNvSpPr txBox="1"/>
-          <p:nvPr/>
-        </p:nvSpPr>
-        <p:spPr>
-          <a:xfrm>
-            <a:off x="11602065" y="6488668"/>
-            <a:ext cx="452283" cy="369332"/>
+            <a:off x="1234722" y="2353083"/>
+            <a:ext cx="10367343" cy="1200329"/>
           </a:xfrm>
           <a:prstGeom prst="rect">
             <a:avLst/>
@@ -6957,269 +6811,6 @@
           <a:lstStyle/>
           <a:p>
             <a:r>
-              <a:rPr lang="pt-BR" sz="1800" b="1" dirty="0">
-                <a:solidFill>
-                  <a:schemeClr val="bg1"/>
-                </a:solidFill>
-                <a:latin typeface="Arial" panose="020B0604020202020204" pitchFamily="34" charset="0"/>
-                <a:cs typeface="Arial" panose="020B0604020202020204" pitchFamily="34" charset="0"/>
-              </a:rPr>
-              <a:t>6</a:t>
-            </a:r>
-            <a:endParaRPr lang="pt-BR" dirty="0">
-              <a:solidFill>
-                <a:schemeClr val="bg1"/>
-              </a:solidFill>
-            </a:endParaRPr>
-          </a:p>
-        </p:txBody>
-      </p:sp>
-      <p:sp>
-        <p:nvSpPr>
-          <p:cNvPr id="2" name="Título 1">
-            <a:extLst>
-              <a:ext uri="{FF2B5EF4-FFF2-40B4-BE49-F238E27FC236}">
-                <a16:creationId xmlns:a16="http://schemas.microsoft.com/office/drawing/2014/main" id="{D721270B-AC96-C2A4-2317-0196F6579F2D}"/>
-              </a:ext>
-            </a:extLst>
-          </p:cNvPr>
-          <p:cNvSpPr txBox="1">
-            <a:spLocks/>
-          </p:cNvSpPr>
-          <p:nvPr/>
-        </p:nvSpPr>
-        <p:spPr>
-          <a:xfrm>
-            <a:off x="-1" y="6457890"/>
-            <a:ext cx="12192001" cy="400110"/>
-          </a:xfrm>
-          <a:prstGeom prst="rect">
-            <a:avLst/>
-          </a:prstGeom>
-        </p:spPr>
-        <p:style>
-          <a:lnRef idx="0">
-            <a:schemeClr val="accent1"/>
-          </a:lnRef>
-          <a:fillRef idx="3">
-            <a:schemeClr val="accent1"/>
-          </a:fillRef>
-          <a:effectRef idx="3">
-            <a:schemeClr val="accent1"/>
-          </a:effectRef>
-          <a:fontRef idx="minor">
-            <a:schemeClr val="lt1"/>
-          </a:fontRef>
-        </p:style>
-        <p:txBody>
-          <a:bodyPr vert="horz" lIns="91440" tIns="45720" rIns="91440" bIns="45720" rtlCol="0" anchor="ctr">
-            <a:normAutofit/>
-          </a:bodyPr>
-          <a:lstStyle>
-            <a:lvl1pPr algn="ctr" defTabSz="914400" rtl="0" eaLnBrk="1" latinLnBrk="0" hangingPunct="1">
-              <a:lnSpc>
-                <a:spcPct val="90000"/>
-              </a:lnSpc>
-              <a:spcBef>
-                <a:spcPct val="0"/>
-              </a:spcBef>
-              <a:buNone/>
-              <a:defRPr sz="6000" kern="1200">
-                <a:solidFill>
-                  <a:schemeClr val="tx1"/>
-                </a:solidFill>
-                <a:latin typeface="+mj-lt"/>
-                <a:ea typeface="+mj-ea"/>
-                <a:cs typeface="+mj-cs"/>
-              </a:defRPr>
-            </a:lvl1pPr>
-          </a:lstStyle>
-          <a:p>
-            <a:r>
-              <a:rPr lang="pt-BR" sz="2000" b="1" dirty="0">
-                <a:solidFill>
-                  <a:schemeClr val="bg1"/>
-                </a:solidFill>
-                <a:latin typeface="Arial" panose="020B0604020202020204" pitchFamily="34" charset="0"/>
-                <a:cs typeface="Arial" panose="020B0604020202020204" pitchFamily="34" charset="0"/>
-              </a:rPr>
-              <a:t>UNIVERSIDADE FEDERAL DE CAMPINA GRANDE (UFCG)</a:t>
-            </a:r>
-          </a:p>
-        </p:txBody>
-      </p:sp>
-      <p:pic>
-        <p:nvPicPr>
-          <p:cNvPr id="3" name="Picture 2" descr="Logomarcas">
-            <a:extLst>
-              <a:ext uri="{FF2B5EF4-FFF2-40B4-BE49-F238E27FC236}">
-                <a16:creationId xmlns:a16="http://schemas.microsoft.com/office/drawing/2014/main" id="{562D30C0-2362-5522-83FE-5C9D4F8ACD77}"/>
-              </a:ext>
-            </a:extLst>
-          </p:cNvPr>
-          <p:cNvPicPr>
-            <a:picLocks noChangeAspect="1" noChangeArrowheads="1"/>
-          </p:cNvPicPr>
-          <p:nvPr/>
-        </p:nvPicPr>
-        <p:blipFill>
-          <a:blip r:embed="rId2">
-            <a:extLst>
-              <a:ext uri="{28A0092B-C50C-407E-A947-70E740481C1C}">
-                <a14:useLocalDpi xmlns:a14="http://schemas.microsoft.com/office/drawing/2010/main" val="0"/>
-              </a:ext>
-            </a:extLst>
-          </a:blip>
-          <a:srcRect/>
-          <a:stretch>
-            <a:fillRect/>
-          </a:stretch>
-        </p:blipFill>
-        <p:spPr bwMode="auto">
-          <a:xfrm>
-            <a:off x="10663716" y="269656"/>
-            <a:ext cx="1210588" cy="1236455"/>
-          </a:xfrm>
-          <a:prstGeom prst="rect">
-            <a:avLst/>
-          </a:prstGeom>
-          <a:noFill/>
-          <a:extLst>
-            <a:ext uri="{909E8E84-426E-40DD-AFC4-6F175D3DCCD1}">
-              <a14:hiddenFill xmlns:a14="http://schemas.microsoft.com/office/drawing/2010/main">
-                <a:solidFill>
-                  <a:srgbClr val="FFFFFF"/>
-                </a:solidFill>
-              </a14:hiddenFill>
-            </a:ext>
-          </a:extLst>
-        </p:spPr>
-      </p:pic>
-      <p:sp>
-        <p:nvSpPr>
-          <p:cNvPr id="4" name="Rectangle 1">
-            <a:extLst>
-              <a:ext uri="{FF2B5EF4-FFF2-40B4-BE49-F238E27FC236}">
-                <a16:creationId xmlns:a16="http://schemas.microsoft.com/office/drawing/2014/main" id="{FC3B93CA-B910-912F-FE0F-123449D8ECC0}"/>
-              </a:ext>
-            </a:extLst>
-          </p:cNvPr>
-          <p:cNvSpPr>
-            <a:spLocks noChangeArrowheads="1"/>
-          </p:cNvSpPr>
-          <p:nvPr/>
-        </p:nvSpPr>
-        <p:spPr bwMode="auto">
-          <a:xfrm>
-            <a:off x="1223682" y="1382667"/>
-            <a:ext cx="4188754" cy="426207"/>
-          </a:xfrm>
-          <a:prstGeom prst="rect">
-            <a:avLst/>
-          </a:prstGeom>
-          <a:noFill/>
-          <a:ln>
-            <a:noFill/>
-          </a:ln>
-          <a:effectLst/>
-          <a:extLst>
-            <a:ext uri="{909E8E84-426E-40DD-AFC4-6F175D3DCCD1}">
-              <a14:hiddenFill xmlns:a14="http://schemas.microsoft.com/office/drawing/2010/main">
-                <a:solidFill>
-                  <a:schemeClr val="accent1"/>
-                </a:solidFill>
-              </a14:hiddenFill>
-            </a:ext>
-            <a:ext uri="{91240B29-F687-4F45-9708-019B960494DF}">
-              <a14:hiddenLine xmlns:a14="http://schemas.microsoft.com/office/drawing/2010/main" w="9525">
-                <a:solidFill>
-                  <a:schemeClr val="tx1"/>
-                </a:solidFill>
-                <a:miter lim="800000"/>
-                <a:headEnd/>
-                <a:tailEnd/>
-              </a14:hiddenLine>
-            </a:ext>
-            <a:ext uri="{AF507438-7753-43E0-B8FC-AC1667EBCBE1}">
-              <a14:hiddenEffects xmlns:a14="http://schemas.microsoft.com/office/drawing/2010/main">
-                <a:effectLst>
-                  <a:outerShdw dist="35921" dir="2700000" algn="ctr" rotWithShape="0">
-                    <a:schemeClr val="bg2"/>
-                  </a:outerShdw>
-                </a:effectLst>
-              </a14:hiddenEffects>
-            </a:ext>
-          </a:extLst>
-        </p:spPr>
-        <p:txBody>
-          <a:bodyPr vert="horz" wrap="square" lIns="91440" tIns="45720" rIns="91440" bIns="45720" numCol="1" anchor="ctr" anchorCtr="0" compatLnSpc="1">
-            <a:prstTxWarp prst="textNoShape">
-              <a:avLst/>
-            </a:prstTxWarp>
-            <a:spAutoFit/>
-          </a:bodyPr>
-          <a:lstStyle/>
-          <a:p>
-            <a:pPr eaLnBrk="0" fontAlgn="base" hangingPunct="0">
-              <a:lnSpc>
-                <a:spcPct val="150000"/>
-              </a:lnSpc>
-              <a:spcBef>
-                <a:spcPct val="0"/>
-              </a:spcBef>
-              <a:spcAft>
-                <a:spcPct val="0"/>
-              </a:spcAft>
-            </a:pPr>
-            <a:r>
-              <a:rPr kumimoji="0" lang="pt-BR" altLang="pt-BR" sz="1600" b="1" u="none" strike="noStrike" cap="none" normalizeH="0" baseline="0" dirty="0">
-                <a:ln>
-                  <a:noFill/>
-                </a:ln>
-                <a:effectLst/>
-                <a:latin typeface="+mj-lt"/>
-              </a:rPr>
-              <a:t>COEFICIENTES DE ANÁLISE</a:t>
-            </a:r>
-            <a:endParaRPr kumimoji="0" lang="pt-BR" altLang="pt-BR" sz="1600" u="none" strike="noStrike" cap="none" normalizeH="0" baseline="0" dirty="0">
-              <a:ln>
-                <a:noFill/>
-              </a:ln>
-              <a:effectLst/>
-              <a:latin typeface="+mj-lt"/>
-            </a:endParaRPr>
-          </a:p>
-        </p:txBody>
-      </p:sp>
-      <p:sp>
-        <p:nvSpPr>
-          <p:cNvPr id="8" name="CaixaDeTexto 7">
-            <a:extLst>
-              <a:ext uri="{FF2B5EF4-FFF2-40B4-BE49-F238E27FC236}">
-                <a16:creationId xmlns:a16="http://schemas.microsoft.com/office/drawing/2014/main" id="{8C3B7273-E210-7997-9C33-B583B7D80EA7}"/>
-              </a:ext>
-            </a:extLst>
-          </p:cNvPr>
-          <p:cNvSpPr txBox="1"/>
-          <p:nvPr/>
-        </p:nvSpPr>
-        <p:spPr>
-          <a:xfrm>
-            <a:off x="1234722" y="2353083"/>
-            <a:ext cx="10367343" cy="1200329"/>
-          </a:xfrm>
-          <a:prstGeom prst="rect">
-            <a:avLst/>
-          </a:prstGeom>
-          <a:noFill/>
-        </p:spPr>
-        <p:txBody>
-          <a:bodyPr wrap="square">
-            <a:spAutoFit/>
-          </a:bodyPr>
-          <a:lstStyle/>
-          <a:p>
-            <a:r>
               <a:rPr lang="pt-BR" b="1" dirty="0"/>
               <a:t>FDR : </a:t>
             </a:r>
@@ -7259,8 +6850,8 @@
           </a:p>
         </p:txBody>
       </p:sp>
-      <mc:AlternateContent xmlns:mc="http://schemas.openxmlformats.org/markup-compatibility/2006">
-        <mc:Choice xmlns:a14="http://schemas.microsoft.com/office/drawing/2010/main" Requires="a14">
+      <mc:AlternateContent xmlns:mc="http://schemas.openxmlformats.org/markup-compatibility/2006" xmlns:a14="http://schemas.microsoft.com/office/drawing/2010/main">
+        <mc:Choice Requires="a14">
           <p:sp>
             <p:nvSpPr>
               <p:cNvPr id="10" name="CaixaDeTexto 9">
@@ -7289,6 +6880,7 @@
               </a:bodyPr>
               <a:lstStyle/>
               <a:p>
+                <a:pPr/>
                 <a14:m>
                   <m:oMathPara xmlns:m="http://schemas.openxmlformats.org/officeDocument/2006/math">
                     <m:oMathParaPr>
@@ -7352,7 +6944,7 @@
             </p:txBody>
           </p:sp>
         </mc:Choice>
-        <mc:Fallback>
+        <mc:Fallback xmlns="">
           <p:sp>
             <p:nvSpPr>
               <p:cNvPr id="10" name="CaixaDeTexto 9">
@@ -7851,7 +7443,7 @@
 </p:sld>
 </file>
 
-<file path=ppt/slides/slide16.xml><?xml version="1.0" encoding="utf-8"?>
+<file path=ppt/slides/slide15.xml><?xml version="1.0" encoding="utf-8"?>
 <p:sld xmlns:a="http://schemas.openxmlformats.org/drawingml/2006/main" xmlns:r="http://schemas.openxmlformats.org/officeDocument/2006/relationships" xmlns:p="http://schemas.openxmlformats.org/presentationml/2006/main">
   <p:cSld>
     <p:spTree>
@@ -8284,8 +7876,8 @@
           </a:p>
         </p:txBody>
       </p:sp>
-      <mc:AlternateContent xmlns:mc="http://schemas.openxmlformats.org/markup-compatibility/2006">
-        <mc:Choice xmlns:a14="http://schemas.microsoft.com/office/drawing/2010/main" Requires="a14">
+      <mc:AlternateContent xmlns:mc="http://schemas.openxmlformats.org/markup-compatibility/2006" xmlns:a14="http://schemas.microsoft.com/office/drawing/2010/main">
+        <mc:Choice Requires="a14">
           <p:sp>
             <p:nvSpPr>
               <p:cNvPr id="7" name="CaixaDeTexto 6">
@@ -8314,6 +7906,7 @@
               </a:bodyPr>
               <a:lstStyle/>
               <a:p>
+                <a:pPr/>
                 <a14:m>
                   <m:oMathPara xmlns:m="http://schemas.openxmlformats.org/officeDocument/2006/math">
                     <m:oMathParaPr>
@@ -8377,7 +7970,7 @@
             </p:txBody>
           </p:sp>
         </mc:Choice>
-        <mc:Fallback>
+        <mc:Fallback xmlns="">
           <p:sp>
             <p:nvSpPr>
               <p:cNvPr id="7" name="CaixaDeTexto 6">
@@ -8876,7 +8469,7 @@
 </p:sld>
 </file>
 
-<file path=ppt/slides/slide17.xml><?xml version="1.0" encoding="utf-8"?>
+<file path=ppt/slides/slide16.xml><?xml version="1.0" encoding="utf-8"?>
 <p:sld xmlns:a="http://schemas.openxmlformats.org/drawingml/2006/main" xmlns:r="http://schemas.openxmlformats.org/officeDocument/2006/relationships" xmlns:p="http://schemas.openxmlformats.org/presentationml/2006/main">
   <p:cSld>
     <p:spTree>
@@ -9291,7 +8884,7 @@
 </p:sld>
 </file>
 
-<file path=ppt/slides/slide18.xml><?xml version="1.0" encoding="utf-8"?>
+<file path=ppt/slides/slide17.xml><?xml version="1.0" encoding="utf-8"?>
 <p:sld xmlns:a="http://schemas.openxmlformats.org/drawingml/2006/main" xmlns:r="http://schemas.openxmlformats.org/officeDocument/2006/relationships" xmlns:p="http://schemas.openxmlformats.org/presentationml/2006/main">
   <p:cSld>
     <p:spTree>
@@ -10348,7 +9941,7 @@
 </p:sld>
 </file>
 
-<file path=ppt/slides/slide19.xml><?xml version="1.0" encoding="utf-8"?>
+<file path=ppt/slides/slide18.xml><?xml version="1.0" encoding="utf-8"?>
 <p:sld xmlns:a="http://schemas.openxmlformats.org/drawingml/2006/main" xmlns:r="http://schemas.openxmlformats.org/officeDocument/2006/relationships" xmlns:p="http://schemas.openxmlformats.org/presentationml/2006/main">
   <p:cSld>
     <p:spTree>
@@ -11177,515 +10770,7 @@
 </p:sld>
 </file>
 
-<file path=ppt/slides/slide2.xml><?xml version="1.0" encoding="utf-8"?>
-<p:sld xmlns:a="http://schemas.openxmlformats.org/drawingml/2006/main" xmlns:r="http://schemas.openxmlformats.org/officeDocument/2006/relationships" xmlns:p="http://schemas.openxmlformats.org/presentationml/2006/main">
-  <p:cSld>
-    <p:spTree>
-      <p:nvGrpSpPr>
-        <p:cNvPr id="1" name="">
-          <a:extLst>
-            <a:ext uri="{FF2B5EF4-FFF2-40B4-BE49-F238E27FC236}">
-              <a16:creationId xmlns:a16="http://schemas.microsoft.com/office/drawing/2014/main" id="{752AB643-7218-2B01-BCDA-649ADFCBD970}"/>
-            </a:ext>
-          </a:extLst>
-        </p:cNvPr>
-        <p:cNvGrpSpPr/>
-        <p:nvPr/>
-      </p:nvGrpSpPr>
-      <p:grpSpPr>
-        <a:xfrm>
-          <a:off x="0" y="0"/>
-          <a:ext cx="0" cy="0"/>
-          <a:chOff x="0" y="0"/>
-          <a:chExt cx="0" cy="0"/>
-        </a:xfrm>
-      </p:grpSpPr>
-      <p:cxnSp>
-        <p:nvCxnSpPr>
-          <p:cNvPr id="6" name="Conector reto 5">
-            <a:extLst>
-              <a:ext uri="{FF2B5EF4-FFF2-40B4-BE49-F238E27FC236}">
-                <a16:creationId xmlns:a16="http://schemas.microsoft.com/office/drawing/2014/main" id="{84F2F874-FC0B-56C2-8CB8-AF9C780E919F}"/>
-              </a:ext>
-            </a:extLst>
-          </p:cNvPr>
-          <p:cNvCxnSpPr>
-            <a:cxnSpLocks/>
-          </p:cNvCxnSpPr>
-          <p:nvPr/>
-        </p:nvCxnSpPr>
-        <p:spPr>
-          <a:xfrm>
-            <a:off x="1223682" y="1342275"/>
-            <a:ext cx="9129686" cy="0"/>
-          </a:xfrm>
-          <a:prstGeom prst="line">
-            <a:avLst/>
-          </a:prstGeom>
-          <a:ln/>
-        </p:spPr>
-        <p:style>
-          <a:lnRef idx="3">
-            <a:schemeClr val="accent3"/>
-          </a:lnRef>
-          <a:fillRef idx="0">
-            <a:schemeClr val="accent3"/>
-          </a:fillRef>
-          <a:effectRef idx="2">
-            <a:schemeClr val="accent3"/>
-          </a:effectRef>
-          <a:fontRef idx="minor">
-            <a:schemeClr val="tx1"/>
-          </a:fontRef>
-        </p:style>
-      </p:cxnSp>
-      <p:sp>
-        <p:nvSpPr>
-          <p:cNvPr id="12" name="CaixaDeTexto 11">
-            <a:extLst>
-              <a:ext uri="{FF2B5EF4-FFF2-40B4-BE49-F238E27FC236}">
-                <a16:creationId xmlns:a16="http://schemas.microsoft.com/office/drawing/2014/main" id="{B6B4EAFF-A4D5-F2CA-1FDA-5F545B089B4A}"/>
-              </a:ext>
-            </a:extLst>
-          </p:cNvPr>
-          <p:cNvSpPr txBox="1"/>
-          <p:nvPr/>
-        </p:nvSpPr>
-        <p:spPr>
-          <a:xfrm>
-            <a:off x="1223682" y="887884"/>
-            <a:ext cx="1210588" cy="400110"/>
-          </a:xfrm>
-          <a:prstGeom prst="rect">
-            <a:avLst/>
-          </a:prstGeom>
-          <a:noFill/>
-        </p:spPr>
-        <p:txBody>
-          <a:bodyPr wrap="none" rtlCol="0">
-            <a:spAutoFit/>
-          </a:bodyPr>
-          <a:lstStyle/>
-          <a:p>
-            <a:r>
-              <a:rPr lang="pt-BR" sz="2000" b="1" dirty="0">
-                <a:latin typeface="Arial" panose="020B0604020202020204" pitchFamily="34" charset="0"/>
-                <a:cs typeface="Arial" panose="020B0604020202020204" pitchFamily="34" charset="0"/>
-              </a:rPr>
-              <a:t>Sumário</a:t>
-            </a:r>
-          </a:p>
-        </p:txBody>
-      </p:sp>
-      <p:sp>
-        <p:nvSpPr>
-          <p:cNvPr id="4" name="Título 1">
-            <a:extLst>
-              <a:ext uri="{FF2B5EF4-FFF2-40B4-BE49-F238E27FC236}">
-                <a16:creationId xmlns:a16="http://schemas.microsoft.com/office/drawing/2014/main" id="{2C535880-AE30-AD40-3D1C-D2DDC19274F6}"/>
-              </a:ext>
-            </a:extLst>
-          </p:cNvPr>
-          <p:cNvSpPr txBox="1">
-            <a:spLocks/>
-          </p:cNvSpPr>
-          <p:nvPr/>
-        </p:nvSpPr>
-        <p:spPr>
-          <a:xfrm>
-            <a:off x="-1" y="6457890"/>
-            <a:ext cx="12192001" cy="400110"/>
-          </a:xfrm>
-          <a:prstGeom prst="rect">
-            <a:avLst/>
-          </a:prstGeom>
-        </p:spPr>
-        <p:style>
-          <a:lnRef idx="0">
-            <a:schemeClr val="accent1"/>
-          </a:lnRef>
-          <a:fillRef idx="3">
-            <a:schemeClr val="accent1"/>
-          </a:fillRef>
-          <a:effectRef idx="3">
-            <a:schemeClr val="accent1"/>
-          </a:effectRef>
-          <a:fontRef idx="minor">
-            <a:schemeClr val="lt1"/>
-          </a:fontRef>
-        </p:style>
-        <p:txBody>
-          <a:bodyPr vert="horz" lIns="91440" tIns="45720" rIns="91440" bIns="45720" rtlCol="0" anchor="ctr">
-            <a:normAutofit/>
-          </a:bodyPr>
-          <a:lstStyle>
-            <a:lvl1pPr algn="ctr" defTabSz="914400" rtl="0" eaLnBrk="1" latinLnBrk="0" hangingPunct="1">
-              <a:lnSpc>
-                <a:spcPct val="90000"/>
-              </a:lnSpc>
-              <a:spcBef>
-                <a:spcPct val="0"/>
-              </a:spcBef>
-              <a:buNone/>
-              <a:defRPr sz="6000" kern="1200">
-                <a:solidFill>
-                  <a:schemeClr val="tx1"/>
-                </a:solidFill>
-                <a:latin typeface="+mj-lt"/>
-                <a:ea typeface="+mj-ea"/>
-                <a:cs typeface="+mj-cs"/>
-              </a:defRPr>
-            </a:lvl1pPr>
-          </a:lstStyle>
-          <a:p>
-            <a:r>
-              <a:rPr lang="pt-BR" sz="2000" b="1" dirty="0">
-                <a:solidFill>
-                  <a:schemeClr val="bg1"/>
-                </a:solidFill>
-                <a:latin typeface="Arial" panose="020B0604020202020204" pitchFamily="34" charset="0"/>
-                <a:cs typeface="Arial" panose="020B0604020202020204" pitchFamily="34" charset="0"/>
-              </a:rPr>
-              <a:t>UNIVERSIDADE FEDERAL DE CAMPINA GRANDE (UFCG)</a:t>
-            </a:r>
-          </a:p>
-        </p:txBody>
-      </p:sp>
-      <p:sp>
-        <p:nvSpPr>
-          <p:cNvPr id="7" name="Subtítulo 2">
-            <a:extLst>
-              <a:ext uri="{FF2B5EF4-FFF2-40B4-BE49-F238E27FC236}">
-                <a16:creationId xmlns:a16="http://schemas.microsoft.com/office/drawing/2014/main" id="{429E21E1-0ACB-1AEF-B647-FC8B575FDC8A}"/>
-              </a:ext>
-            </a:extLst>
-          </p:cNvPr>
-          <p:cNvSpPr>
-            <a:spLocks noGrp="1"/>
-          </p:cNvSpPr>
-          <p:nvPr>
-            <p:ph type="subTitle" idx="1"/>
-          </p:nvPr>
-        </p:nvSpPr>
-        <p:spPr>
-          <a:xfrm>
-            <a:off x="1226336" y="1665002"/>
-            <a:ext cx="9778548" cy="4064483"/>
-          </a:xfrm>
-        </p:spPr>
-        <p:txBody>
-          <a:bodyPr numCol="1">
-            <a:normAutofit/>
-          </a:bodyPr>
-          <a:lstStyle/>
-          <a:p>
-            <a:pPr marL="342900" indent="-342900" algn="l">
-              <a:lnSpc>
-                <a:spcPct val="100000"/>
-              </a:lnSpc>
-              <a:buAutoNum type="arabicPeriod"/>
-            </a:pPr>
-            <a:r>
-              <a:rPr lang="pt-BR" sz="1400" b="1" dirty="0">
-                <a:latin typeface="Arial" panose="020B0604020202020204" pitchFamily="34" charset="0"/>
-                <a:cs typeface="Arial" panose="020B0604020202020204" pitchFamily="34" charset="0"/>
-              </a:rPr>
-              <a:t>Introdução e </a:t>
-            </a:r>
-            <a:r>
-              <a:rPr lang="pt-BR" sz="1400" b="1" dirty="0" err="1">
-                <a:latin typeface="Arial" panose="020B0604020202020204" pitchFamily="34" charset="0"/>
-                <a:cs typeface="Arial" panose="020B0604020202020204" pitchFamily="34" charset="0"/>
-              </a:rPr>
-              <a:t>Problematica</a:t>
-            </a:r>
-            <a:endParaRPr lang="pt-BR" sz="1400" b="1" dirty="0">
-              <a:latin typeface="Arial" panose="020B0604020202020204" pitchFamily="34" charset="0"/>
-              <a:cs typeface="Arial" panose="020B0604020202020204" pitchFamily="34" charset="0"/>
-            </a:endParaRPr>
-          </a:p>
-          <a:p>
-            <a:pPr marL="800100" lvl="1" indent="-342900" algn="l">
-              <a:lnSpc>
-                <a:spcPct val="100000"/>
-              </a:lnSpc>
-              <a:buFont typeface="Arial" panose="020B0604020202020204" pitchFamily="34" charset="0"/>
-              <a:buChar char="•"/>
-            </a:pPr>
-            <a:r>
-              <a:rPr lang="pt-BR" sz="1200" dirty="0">
-                <a:latin typeface="Arial" panose="020B0604020202020204" pitchFamily="34" charset="0"/>
-                <a:cs typeface="Arial" panose="020B0604020202020204" pitchFamily="34" charset="0"/>
-              </a:rPr>
-              <a:t>Definição de falhas</a:t>
-            </a:r>
-          </a:p>
-          <a:p>
-            <a:pPr marL="800100" lvl="1" indent="-342900" algn="l">
-              <a:lnSpc>
-                <a:spcPct val="100000"/>
-              </a:lnSpc>
-              <a:buFont typeface="Arial" panose="020B0604020202020204" pitchFamily="34" charset="0"/>
-              <a:buChar char="•"/>
-            </a:pPr>
-            <a:r>
-              <a:rPr lang="pt-BR" sz="1200" dirty="0">
-                <a:latin typeface="Arial" panose="020B0604020202020204" pitchFamily="34" charset="0"/>
-                <a:cs typeface="Arial" panose="020B0604020202020204" pitchFamily="34" charset="0"/>
-              </a:rPr>
-              <a:t>Processo de Tennesse Eastman</a:t>
-            </a:r>
-          </a:p>
-          <a:p>
-            <a:pPr marL="342900" indent="-342900" algn="l">
-              <a:lnSpc>
-                <a:spcPct val="100000"/>
-              </a:lnSpc>
-              <a:buAutoNum type="arabicPeriod"/>
-            </a:pPr>
-            <a:r>
-              <a:rPr lang="pt-BR" sz="1400" b="1" dirty="0">
-                <a:latin typeface="Arial" panose="020B0604020202020204" pitchFamily="34" charset="0"/>
-                <a:cs typeface="Arial" panose="020B0604020202020204" pitchFamily="34" charset="0"/>
-              </a:rPr>
-              <a:t>Metodologia de Testes</a:t>
-            </a:r>
-          </a:p>
-          <a:p>
-            <a:pPr marL="800100" lvl="1" indent="-342900" algn="l">
-              <a:lnSpc>
-                <a:spcPct val="100000"/>
-              </a:lnSpc>
-              <a:buFont typeface="Arial" panose="020B0604020202020204" pitchFamily="34" charset="0"/>
-              <a:buChar char="•"/>
-            </a:pPr>
-            <a:r>
-              <a:rPr lang="pt-BR" sz="1200" dirty="0">
-                <a:latin typeface="Arial" panose="020B0604020202020204" pitchFamily="34" charset="0"/>
-                <a:cs typeface="Arial" panose="020B0604020202020204" pitchFamily="34" charset="0"/>
-              </a:rPr>
-              <a:t>Métodos utilizados</a:t>
-            </a:r>
-          </a:p>
-          <a:p>
-            <a:pPr marL="800100" lvl="1" indent="-342900" algn="l">
-              <a:lnSpc>
-                <a:spcPct val="100000"/>
-              </a:lnSpc>
-              <a:buFont typeface="Arial" panose="020B0604020202020204" pitchFamily="34" charset="0"/>
-              <a:buChar char="•"/>
-            </a:pPr>
-            <a:r>
-              <a:rPr lang="pt-BR" sz="1200" dirty="0">
-                <a:latin typeface="Arial" panose="020B0604020202020204" pitchFamily="34" charset="0"/>
-                <a:cs typeface="Arial" panose="020B0604020202020204" pitchFamily="34" charset="0"/>
-              </a:rPr>
-              <a:t>Estatísticas Utilizadas </a:t>
-            </a:r>
-          </a:p>
-          <a:p>
-            <a:pPr marL="800100" lvl="1" indent="-342900" algn="l">
-              <a:lnSpc>
-                <a:spcPct val="100000"/>
-              </a:lnSpc>
-              <a:buFont typeface="Arial" panose="020B0604020202020204" pitchFamily="34" charset="0"/>
-              <a:buChar char="•"/>
-            </a:pPr>
-            <a:r>
-              <a:rPr lang="pt-BR" sz="1200" dirty="0">
-                <a:latin typeface="Arial" panose="020B0604020202020204" pitchFamily="34" charset="0"/>
-                <a:cs typeface="Arial" panose="020B0604020202020204" pitchFamily="34" charset="0"/>
-              </a:rPr>
-              <a:t>Processo de treino e teste</a:t>
-            </a:r>
-          </a:p>
-          <a:p>
-            <a:pPr marL="800100" lvl="1" indent="-342900" algn="l">
-              <a:lnSpc>
-                <a:spcPct val="100000"/>
-              </a:lnSpc>
-              <a:buFont typeface="Arial" panose="020B0604020202020204" pitchFamily="34" charset="0"/>
-              <a:buChar char="•"/>
-            </a:pPr>
-            <a:r>
-              <a:rPr lang="pt-BR" sz="1200" dirty="0">
-                <a:latin typeface="Arial" panose="020B0604020202020204" pitchFamily="34" charset="0"/>
-                <a:cs typeface="Arial" panose="020B0604020202020204" pitchFamily="34" charset="0"/>
-              </a:rPr>
-              <a:t>Coeficientes para Análise</a:t>
-            </a:r>
-          </a:p>
-          <a:p>
-            <a:pPr marL="342900" indent="-342900" algn="l">
-              <a:lnSpc>
-                <a:spcPct val="100000"/>
-              </a:lnSpc>
-              <a:buAutoNum type="arabicPeriod"/>
-            </a:pPr>
-            <a:r>
-              <a:rPr lang="pt-BR" sz="1400" b="1" dirty="0">
-                <a:latin typeface="Arial" panose="020B0604020202020204" pitchFamily="34" charset="0"/>
-                <a:cs typeface="Arial" panose="020B0604020202020204" pitchFamily="34" charset="0"/>
-              </a:rPr>
-              <a:t>Resultados</a:t>
-            </a:r>
-          </a:p>
-          <a:p>
-            <a:pPr marL="800100" lvl="1" indent="-342900" algn="l">
-              <a:lnSpc>
-                <a:spcPct val="100000"/>
-              </a:lnSpc>
-              <a:buFont typeface="Arial" panose="020B0604020202020204" pitchFamily="34" charset="0"/>
-              <a:buChar char="•"/>
-            </a:pPr>
-            <a:r>
-              <a:rPr lang="pt-BR" sz="1200" dirty="0" err="1">
-                <a:latin typeface="Arial" panose="020B0604020202020204" pitchFamily="34" charset="0"/>
-                <a:cs typeface="Arial" panose="020B0604020202020204" pitchFamily="34" charset="0"/>
-              </a:rPr>
-              <a:t>FDRs</a:t>
-            </a:r>
-            <a:r>
-              <a:rPr lang="pt-BR" sz="1200" dirty="0">
-                <a:latin typeface="Arial" panose="020B0604020202020204" pitchFamily="34" charset="0"/>
-                <a:cs typeface="Arial" panose="020B0604020202020204" pitchFamily="34" charset="0"/>
-              </a:rPr>
-              <a:t> e </a:t>
-            </a:r>
-            <a:r>
-              <a:rPr lang="pt-BR" sz="1200" dirty="0" err="1">
-                <a:latin typeface="Arial" panose="020B0604020202020204" pitchFamily="34" charset="0"/>
-                <a:cs typeface="Arial" panose="020B0604020202020204" pitchFamily="34" charset="0"/>
-              </a:rPr>
-              <a:t>FDAs</a:t>
-            </a:r>
-            <a:endParaRPr lang="pt-BR" sz="1200" dirty="0">
-              <a:latin typeface="Arial" panose="020B0604020202020204" pitchFamily="34" charset="0"/>
-              <a:cs typeface="Arial" panose="020B0604020202020204" pitchFamily="34" charset="0"/>
-            </a:endParaRPr>
-          </a:p>
-          <a:p>
-            <a:pPr marL="342900" indent="-342900" algn="l">
-              <a:lnSpc>
-                <a:spcPct val="100000"/>
-              </a:lnSpc>
-              <a:buAutoNum type="arabicPeriod"/>
-            </a:pPr>
-            <a:r>
-              <a:rPr lang="pt-BR" sz="1400" b="1" dirty="0">
-                <a:latin typeface="Arial" panose="020B0604020202020204" pitchFamily="34" charset="0"/>
-                <a:cs typeface="Arial" panose="020B0604020202020204" pitchFamily="34" charset="0"/>
-              </a:rPr>
-              <a:t>Conclusões</a:t>
-            </a:r>
-          </a:p>
-          <a:p>
-            <a:pPr marL="800100" lvl="1" indent="-342900" algn="l">
-              <a:lnSpc>
-                <a:spcPct val="100000"/>
-              </a:lnSpc>
-              <a:buFont typeface="Arial" panose="020B0604020202020204" pitchFamily="34" charset="0"/>
-              <a:buChar char="•"/>
-            </a:pPr>
-            <a:r>
-              <a:rPr lang="pt-BR" sz="1200" dirty="0">
-                <a:latin typeface="Arial" panose="020B0604020202020204" pitchFamily="34" charset="0"/>
-                <a:cs typeface="Arial" panose="020B0604020202020204" pitchFamily="34" charset="0"/>
-              </a:rPr>
-              <a:t>Refinamento</a:t>
-            </a:r>
-          </a:p>
-          <a:p>
-            <a:pPr marL="800100" lvl="1" indent="-342900" algn="l">
-              <a:lnSpc>
-                <a:spcPct val="100000"/>
-              </a:lnSpc>
-              <a:buFont typeface="Arial" panose="020B0604020202020204" pitchFamily="34" charset="0"/>
-              <a:buChar char="•"/>
-            </a:pPr>
-            <a:r>
-              <a:rPr lang="pt-BR" sz="1200" dirty="0">
-                <a:latin typeface="Arial" panose="020B0604020202020204" pitchFamily="34" charset="0"/>
-                <a:cs typeface="Arial" panose="020B0604020202020204" pitchFamily="34" charset="0"/>
-              </a:rPr>
-              <a:t>Trabalhos futuros</a:t>
-            </a:r>
-          </a:p>
-          <a:p>
-            <a:pPr marL="800100" lvl="1" indent="-342900" algn="l">
-              <a:lnSpc>
-                <a:spcPct val="100000"/>
-              </a:lnSpc>
-              <a:buAutoNum type="arabicPeriod"/>
-            </a:pPr>
-            <a:endParaRPr lang="pt-BR" sz="1200" dirty="0">
-              <a:latin typeface="Arial" panose="020B0604020202020204" pitchFamily="34" charset="0"/>
-              <a:cs typeface="Arial" panose="020B0604020202020204" pitchFamily="34" charset="0"/>
-            </a:endParaRPr>
-          </a:p>
-        </p:txBody>
-      </p:sp>
-      <p:pic>
-        <p:nvPicPr>
-          <p:cNvPr id="2050" name="Picture 2" descr="Logomarcas">
-            <a:extLst>
-              <a:ext uri="{FF2B5EF4-FFF2-40B4-BE49-F238E27FC236}">
-                <a16:creationId xmlns:a16="http://schemas.microsoft.com/office/drawing/2014/main" id="{649A176D-48AC-0BE4-8D78-2B7EB3A40A00}"/>
-              </a:ext>
-            </a:extLst>
-          </p:cNvPr>
-          <p:cNvPicPr>
-            <a:picLocks noChangeAspect="1" noChangeArrowheads="1"/>
-          </p:cNvPicPr>
-          <p:nvPr/>
-        </p:nvPicPr>
-        <p:blipFill>
-          <a:blip r:embed="rId2">
-            <a:extLst>
-              <a:ext uri="{28A0092B-C50C-407E-A947-70E740481C1C}">
-                <a14:useLocalDpi xmlns:a14="http://schemas.microsoft.com/office/drawing/2010/main" val="0"/>
-              </a:ext>
-            </a:extLst>
-          </a:blip>
-          <a:srcRect/>
-          <a:stretch>
-            <a:fillRect/>
-          </a:stretch>
-        </p:blipFill>
-        <p:spPr bwMode="auto">
-          <a:xfrm>
-            <a:off x="10663716" y="269656"/>
-            <a:ext cx="1210588" cy="1236455"/>
-          </a:xfrm>
-          <a:prstGeom prst="rect">
-            <a:avLst/>
-          </a:prstGeom>
-          <a:noFill/>
-          <a:extLst>
-            <a:ext uri="{909E8E84-426E-40DD-AFC4-6F175D3DCCD1}">
-              <a14:hiddenFill xmlns:a14="http://schemas.microsoft.com/office/drawing/2010/main">
-                <a:solidFill>
-                  <a:srgbClr val="FFFFFF"/>
-                </a:solidFill>
-              </a14:hiddenFill>
-            </a:ext>
-          </a:extLst>
-        </p:spPr>
-      </p:pic>
-    </p:spTree>
-    <p:extLst>
-      <p:ext uri="{BB962C8B-B14F-4D97-AF65-F5344CB8AC3E}">
-        <p14:creationId xmlns:p14="http://schemas.microsoft.com/office/powerpoint/2010/main" val="3959790437"/>
-      </p:ext>
-    </p:extLst>
-  </p:cSld>
-  <p:clrMapOvr>
-    <a:masterClrMapping/>
-  </p:clrMapOvr>
-</p:sld>
-</file>
-
-<file path=ppt/slides/slide20.xml><?xml version="1.0" encoding="utf-8"?>
+<file path=ppt/slides/slide19.xml><?xml version="1.0" encoding="utf-8"?>
 <p:sld xmlns:a="http://schemas.openxmlformats.org/drawingml/2006/main" xmlns:r="http://schemas.openxmlformats.org/officeDocument/2006/relationships" xmlns:p="http://schemas.openxmlformats.org/presentationml/2006/main">
   <p:cSld>
     <p:spTree>
@@ -12595,7 +11680,515 @@
 </p:sld>
 </file>
 
-<file path=ppt/slides/slide21.xml><?xml version="1.0" encoding="utf-8"?>
+<file path=ppt/slides/slide2.xml><?xml version="1.0" encoding="utf-8"?>
+<p:sld xmlns:a="http://schemas.openxmlformats.org/drawingml/2006/main" xmlns:r="http://schemas.openxmlformats.org/officeDocument/2006/relationships" xmlns:p="http://schemas.openxmlformats.org/presentationml/2006/main">
+  <p:cSld>
+    <p:spTree>
+      <p:nvGrpSpPr>
+        <p:cNvPr id="1" name="">
+          <a:extLst>
+            <a:ext uri="{FF2B5EF4-FFF2-40B4-BE49-F238E27FC236}">
+              <a16:creationId xmlns:a16="http://schemas.microsoft.com/office/drawing/2014/main" id="{752AB643-7218-2B01-BCDA-649ADFCBD970}"/>
+            </a:ext>
+          </a:extLst>
+        </p:cNvPr>
+        <p:cNvGrpSpPr/>
+        <p:nvPr/>
+      </p:nvGrpSpPr>
+      <p:grpSpPr>
+        <a:xfrm>
+          <a:off x="0" y="0"/>
+          <a:ext cx="0" cy="0"/>
+          <a:chOff x="0" y="0"/>
+          <a:chExt cx="0" cy="0"/>
+        </a:xfrm>
+      </p:grpSpPr>
+      <p:cxnSp>
+        <p:nvCxnSpPr>
+          <p:cNvPr id="6" name="Conector reto 5">
+            <a:extLst>
+              <a:ext uri="{FF2B5EF4-FFF2-40B4-BE49-F238E27FC236}">
+                <a16:creationId xmlns:a16="http://schemas.microsoft.com/office/drawing/2014/main" id="{84F2F874-FC0B-56C2-8CB8-AF9C780E919F}"/>
+              </a:ext>
+            </a:extLst>
+          </p:cNvPr>
+          <p:cNvCxnSpPr>
+            <a:cxnSpLocks/>
+          </p:cNvCxnSpPr>
+          <p:nvPr/>
+        </p:nvCxnSpPr>
+        <p:spPr>
+          <a:xfrm>
+            <a:off x="1223682" y="1342275"/>
+            <a:ext cx="9129686" cy="0"/>
+          </a:xfrm>
+          <a:prstGeom prst="line">
+            <a:avLst/>
+          </a:prstGeom>
+          <a:ln/>
+        </p:spPr>
+        <p:style>
+          <a:lnRef idx="3">
+            <a:schemeClr val="accent3"/>
+          </a:lnRef>
+          <a:fillRef idx="0">
+            <a:schemeClr val="accent3"/>
+          </a:fillRef>
+          <a:effectRef idx="2">
+            <a:schemeClr val="accent3"/>
+          </a:effectRef>
+          <a:fontRef idx="minor">
+            <a:schemeClr val="tx1"/>
+          </a:fontRef>
+        </p:style>
+      </p:cxnSp>
+      <p:sp>
+        <p:nvSpPr>
+          <p:cNvPr id="12" name="CaixaDeTexto 11">
+            <a:extLst>
+              <a:ext uri="{FF2B5EF4-FFF2-40B4-BE49-F238E27FC236}">
+                <a16:creationId xmlns:a16="http://schemas.microsoft.com/office/drawing/2014/main" id="{B6B4EAFF-A4D5-F2CA-1FDA-5F545B089B4A}"/>
+              </a:ext>
+            </a:extLst>
+          </p:cNvPr>
+          <p:cNvSpPr txBox="1"/>
+          <p:nvPr/>
+        </p:nvSpPr>
+        <p:spPr>
+          <a:xfrm>
+            <a:off x="1223682" y="887884"/>
+            <a:ext cx="1210588" cy="400110"/>
+          </a:xfrm>
+          <a:prstGeom prst="rect">
+            <a:avLst/>
+          </a:prstGeom>
+          <a:noFill/>
+        </p:spPr>
+        <p:txBody>
+          <a:bodyPr wrap="none" rtlCol="0">
+            <a:spAutoFit/>
+          </a:bodyPr>
+          <a:lstStyle/>
+          <a:p>
+            <a:r>
+              <a:rPr lang="pt-BR" sz="2000" b="1" dirty="0">
+                <a:latin typeface="Arial" panose="020B0604020202020204" pitchFamily="34" charset="0"/>
+                <a:cs typeface="Arial" panose="020B0604020202020204" pitchFamily="34" charset="0"/>
+              </a:rPr>
+              <a:t>Sumário</a:t>
+            </a:r>
+          </a:p>
+        </p:txBody>
+      </p:sp>
+      <p:sp>
+        <p:nvSpPr>
+          <p:cNvPr id="4" name="Título 1">
+            <a:extLst>
+              <a:ext uri="{FF2B5EF4-FFF2-40B4-BE49-F238E27FC236}">
+                <a16:creationId xmlns:a16="http://schemas.microsoft.com/office/drawing/2014/main" id="{2C535880-AE30-AD40-3D1C-D2DDC19274F6}"/>
+              </a:ext>
+            </a:extLst>
+          </p:cNvPr>
+          <p:cNvSpPr txBox="1">
+            <a:spLocks/>
+          </p:cNvSpPr>
+          <p:nvPr/>
+        </p:nvSpPr>
+        <p:spPr>
+          <a:xfrm>
+            <a:off x="-1" y="6457890"/>
+            <a:ext cx="12192001" cy="400110"/>
+          </a:xfrm>
+          <a:prstGeom prst="rect">
+            <a:avLst/>
+          </a:prstGeom>
+        </p:spPr>
+        <p:style>
+          <a:lnRef idx="0">
+            <a:schemeClr val="accent1"/>
+          </a:lnRef>
+          <a:fillRef idx="3">
+            <a:schemeClr val="accent1"/>
+          </a:fillRef>
+          <a:effectRef idx="3">
+            <a:schemeClr val="accent1"/>
+          </a:effectRef>
+          <a:fontRef idx="minor">
+            <a:schemeClr val="lt1"/>
+          </a:fontRef>
+        </p:style>
+        <p:txBody>
+          <a:bodyPr vert="horz" lIns="91440" tIns="45720" rIns="91440" bIns="45720" rtlCol="0" anchor="ctr">
+            <a:normAutofit/>
+          </a:bodyPr>
+          <a:lstStyle>
+            <a:lvl1pPr algn="ctr" defTabSz="914400" rtl="0" eaLnBrk="1" latinLnBrk="0" hangingPunct="1">
+              <a:lnSpc>
+                <a:spcPct val="90000"/>
+              </a:lnSpc>
+              <a:spcBef>
+                <a:spcPct val="0"/>
+              </a:spcBef>
+              <a:buNone/>
+              <a:defRPr sz="6000" kern="1200">
+                <a:solidFill>
+                  <a:schemeClr val="tx1"/>
+                </a:solidFill>
+                <a:latin typeface="+mj-lt"/>
+                <a:ea typeface="+mj-ea"/>
+                <a:cs typeface="+mj-cs"/>
+              </a:defRPr>
+            </a:lvl1pPr>
+          </a:lstStyle>
+          <a:p>
+            <a:r>
+              <a:rPr lang="pt-BR" sz="2000" b="1" dirty="0">
+                <a:solidFill>
+                  <a:schemeClr val="bg1"/>
+                </a:solidFill>
+                <a:latin typeface="Arial" panose="020B0604020202020204" pitchFamily="34" charset="0"/>
+                <a:cs typeface="Arial" panose="020B0604020202020204" pitchFamily="34" charset="0"/>
+              </a:rPr>
+              <a:t>UNIVERSIDADE FEDERAL DE CAMPINA GRANDE (UFCG)</a:t>
+            </a:r>
+          </a:p>
+        </p:txBody>
+      </p:sp>
+      <p:sp>
+        <p:nvSpPr>
+          <p:cNvPr id="7" name="Subtítulo 2">
+            <a:extLst>
+              <a:ext uri="{FF2B5EF4-FFF2-40B4-BE49-F238E27FC236}">
+                <a16:creationId xmlns:a16="http://schemas.microsoft.com/office/drawing/2014/main" id="{429E21E1-0ACB-1AEF-B647-FC8B575FDC8A}"/>
+              </a:ext>
+            </a:extLst>
+          </p:cNvPr>
+          <p:cNvSpPr>
+            <a:spLocks noGrp="1"/>
+          </p:cNvSpPr>
+          <p:nvPr>
+            <p:ph type="subTitle" idx="1"/>
+          </p:nvPr>
+        </p:nvSpPr>
+        <p:spPr>
+          <a:xfrm>
+            <a:off x="1226336" y="1665002"/>
+            <a:ext cx="9778548" cy="4064483"/>
+          </a:xfrm>
+        </p:spPr>
+        <p:txBody>
+          <a:bodyPr numCol="1">
+            <a:normAutofit/>
+          </a:bodyPr>
+          <a:lstStyle/>
+          <a:p>
+            <a:pPr marL="342900" indent="-342900" algn="l">
+              <a:lnSpc>
+                <a:spcPct val="100000"/>
+              </a:lnSpc>
+              <a:buAutoNum type="arabicPeriod"/>
+            </a:pPr>
+            <a:r>
+              <a:rPr lang="pt-BR" sz="1400" b="1" dirty="0">
+                <a:latin typeface="Arial" panose="020B0604020202020204" pitchFamily="34" charset="0"/>
+                <a:cs typeface="Arial" panose="020B0604020202020204" pitchFamily="34" charset="0"/>
+              </a:rPr>
+              <a:t>Introdução e </a:t>
+            </a:r>
+            <a:r>
+              <a:rPr lang="pt-BR" sz="1400" b="1" dirty="0" err="1">
+                <a:latin typeface="Arial" panose="020B0604020202020204" pitchFamily="34" charset="0"/>
+                <a:cs typeface="Arial" panose="020B0604020202020204" pitchFamily="34" charset="0"/>
+              </a:rPr>
+              <a:t>Problematica</a:t>
+            </a:r>
+            <a:endParaRPr lang="pt-BR" sz="1400" b="1" dirty="0">
+              <a:latin typeface="Arial" panose="020B0604020202020204" pitchFamily="34" charset="0"/>
+              <a:cs typeface="Arial" panose="020B0604020202020204" pitchFamily="34" charset="0"/>
+            </a:endParaRPr>
+          </a:p>
+          <a:p>
+            <a:pPr marL="800100" lvl="1" indent="-342900" algn="l">
+              <a:lnSpc>
+                <a:spcPct val="100000"/>
+              </a:lnSpc>
+              <a:buFont typeface="Arial" panose="020B0604020202020204" pitchFamily="34" charset="0"/>
+              <a:buChar char="•"/>
+            </a:pPr>
+            <a:r>
+              <a:rPr lang="pt-BR" sz="1200" dirty="0">
+                <a:latin typeface="Arial" panose="020B0604020202020204" pitchFamily="34" charset="0"/>
+                <a:cs typeface="Arial" panose="020B0604020202020204" pitchFamily="34" charset="0"/>
+              </a:rPr>
+              <a:t>Definição de falhas</a:t>
+            </a:r>
+          </a:p>
+          <a:p>
+            <a:pPr marL="800100" lvl="1" indent="-342900" algn="l">
+              <a:lnSpc>
+                <a:spcPct val="100000"/>
+              </a:lnSpc>
+              <a:buFont typeface="Arial" panose="020B0604020202020204" pitchFamily="34" charset="0"/>
+              <a:buChar char="•"/>
+            </a:pPr>
+            <a:r>
+              <a:rPr lang="pt-BR" sz="1200" dirty="0">
+                <a:latin typeface="Arial" panose="020B0604020202020204" pitchFamily="34" charset="0"/>
+                <a:cs typeface="Arial" panose="020B0604020202020204" pitchFamily="34" charset="0"/>
+              </a:rPr>
+              <a:t>Processo de Tennesse Eastman</a:t>
+            </a:r>
+          </a:p>
+          <a:p>
+            <a:pPr marL="342900" indent="-342900" algn="l">
+              <a:lnSpc>
+                <a:spcPct val="100000"/>
+              </a:lnSpc>
+              <a:buAutoNum type="arabicPeriod"/>
+            </a:pPr>
+            <a:r>
+              <a:rPr lang="pt-BR" sz="1400" b="1" dirty="0">
+                <a:latin typeface="Arial" panose="020B0604020202020204" pitchFamily="34" charset="0"/>
+                <a:cs typeface="Arial" panose="020B0604020202020204" pitchFamily="34" charset="0"/>
+              </a:rPr>
+              <a:t>Metodologia de Testes</a:t>
+            </a:r>
+          </a:p>
+          <a:p>
+            <a:pPr marL="800100" lvl="1" indent="-342900" algn="l">
+              <a:lnSpc>
+                <a:spcPct val="100000"/>
+              </a:lnSpc>
+              <a:buFont typeface="Arial" panose="020B0604020202020204" pitchFamily="34" charset="0"/>
+              <a:buChar char="•"/>
+            </a:pPr>
+            <a:r>
+              <a:rPr lang="pt-BR" sz="1200" dirty="0">
+                <a:latin typeface="Arial" panose="020B0604020202020204" pitchFamily="34" charset="0"/>
+                <a:cs typeface="Arial" panose="020B0604020202020204" pitchFamily="34" charset="0"/>
+              </a:rPr>
+              <a:t>Métodos utilizados</a:t>
+            </a:r>
+          </a:p>
+          <a:p>
+            <a:pPr marL="800100" lvl="1" indent="-342900" algn="l">
+              <a:lnSpc>
+                <a:spcPct val="100000"/>
+              </a:lnSpc>
+              <a:buFont typeface="Arial" panose="020B0604020202020204" pitchFamily="34" charset="0"/>
+              <a:buChar char="•"/>
+            </a:pPr>
+            <a:r>
+              <a:rPr lang="pt-BR" sz="1200" dirty="0">
+                <a:latin typeface="Arial" panose="020B0604020202020204" pitchFamily="34" charset="0"/>
+                <a:cs typeface="Arial" panose="020B0604020202020204" pitchFamily="34" charset="0"/>
+              </a:rPr>
+              <a:t>Estatísticas Utilizadas </a:t>
+            </a:r>
+          </a:p>
+          <a:p>
+            <a:pPr marL="800100" lvl="1" indent="-342900" algn="l">
+              <a:lnSpc>
+                <a:spcPct val="100000"/>
+              </a:lnSpc>
+              <a:buFont typeface="Arial" panose="020B0604020202020204" pitchFamily="34" charset="0"/>
+              <a:buChar char="•"/>
+            </a:pPr>
+            <a:r>
+              <a:rPr lang="pt-BR" sz="1200" dirty="0">
+                <a:latin typeface="Arial" panose="020B0604020202020204" pitchFamily="34" charset="0"/>
+                <a:cs typeface="Arial" panose="020B0604020202020204" pitchFamily="34" charset="0"/>
+              </a:rPr>
+              <a:t>Processo de treino e teste</a:t>
+            </a:r>
+          </a:p>
+          <a:p>
+            <a:pPr marL="800100" lvl="1" indent="-342900" algn="l">
+              <a:lnSpc>
+                <a:spcPct val="100000"/>
+              </a:lnSpc>
+              <a:buFont typeface="Arial" panose="020B0604020202020204" pitchFamily="34" charset="0"/>
+              <a:buChar char="•"/>
+            </a:pPr>
+            <a:r>
+              <a:rPr lang="pt-BR" sz="1200" dirty="0">
+                <a:latin typeface="Arial" panose="020B0604020202020204" pitchFamily="34" charset="0"/>
+                <a:cs typeface="Arial" panose="020B0604020202020204" pitchFamily="34" charset="0"/>
+              </a:rPr>
+              <a:t>Coeficientes para Análise</a:t>
+            </a:r>
+          </a:p>
+          <a:p>
+            <a:pPr marL="342900" indent="-342900" algn="l">
+              <a:lnSpc>
+                <a:spcPct val="100000"/>
+              </a:lnSpc>
+              <a:buAutoNum type="arabicPeriod"/>
+            </a:pPr>
+            <a:r>
+              <a:rPr lang="pt-BR" sz="1400" b="1" dirty="0">
+                <a:latin typeface="Arial" panose="020B0604020202020204" pitchFamily="34" charset="0"/>
+                <a:cs typeface="Arial" panose="020B0604020202020204" pitchFamily="34" charset="0"/>
+              </a:rPr>
+              <a:t>Resultados</a:t>
+            </a:r>
+          </a:p>
+          <a:p>
+            <a:pPr marL="800100" lvl="1" indent="-342900" algn="l">
+              <a:lnSpc>
+                <a:spcPct val="100000"/>
+              </a:lnSpc>
+              <a:buFont typeface="Arial" panose="020B0604020202020204" pitchFamily="34" charset="0"/>
+              <a:buChar char="•"/>
+            </a:pPr>
+            <a:r>
+              <a:rPr lang="pt-BR" sz="1200" dirty="0" err="1">
+                <a:latin typeface="Arial" panose="020B0604020202020204" pitchFamily="34" charset="0"/>
+                <a:cs typeface="Arial" panose="020B0604020202020204" pitchFamily="34" charset="0"/>
+              </a:rPr>
+              <a:t>FDRs</a:t>
+            </a:r>
+            <a:r>
+              <a:rPr lang="pt-BR" sz="1200" dirty="0">
+                <a:latin typeface="Arial" panose="020B0604020202020204" pitchFamily="34" charset="0"/>
+                <a:cs typeface="Arial" panose="020B0604020202020204" pitchFamily="34" charset="0"/>
+              </a:rPr>
+              <a:t> e </a:t>
+            </a:r>
+            <a:r>
+              <a:rPr lang="pt-BR" sz="1200" dirty="0" err="1">
+                <a:latin typeface="Arial" panose="020B0604020202020204" pitchFamily="34" charset="0"/>
+                <a:cs typeface="Arial" panose="020B0604020202020204" pitchFamily="34" charset="0"/>
+              </a:rPr>
+              <a:t>FDAs</a:t>
+            </a:r>
+            <a:endParaRPr lang="pt-BR" sz="1200" dirty="0">
+              <a:latin typeface="Arial" panose="020B0604020202020204" pitchFamily="34" charset="0"/>
+              <a:cs typeface="Arial" panose="020B0604020202020204" pitchFamily="34" charset="0"/>
+            </a:endParaRPr>
+          </a:p>
+          <a:p>
+            <a:pPr marL="342900" indent="-342900" algn="l">
+              <a:lnSpc>
+                <a:spcPct val="100000"/>
+              </a:lnSpc>
+              <a:buAutoNum type="arabicPeriod"/>
+            </a:pPr>
+            <a:r>
+              <a:rPr lang="pt-BR" sz="1400" b="1" dirty="0">
+                <a:latin typeface="Arial" panose="020B0604020202020204" pitchFamily="34" charset="0"/>
+                <a:cs typeface="Arial" panose="020B0604020202020204" pitchFamily="34" charset="0"/>
+              </a:rPr>
+              <a:t>Conclusões</a:t>
+            </a:r>
+          </a:p>
+          <a:p>
+            <a:pPr marL="800100" lvl="1" indent="-342900" algn="l">
+              <a:lnSpc>
+                <a:spcPct val="100000"/>
+              </a:lnSpc>
+              <a:buFont typeface="Arial" panose="020B0604020202020204" pitchFamily="34" charset="0"/>
+              <a:buChar char="•"/>
+            </a:pPr>
+            <a:r>
+              <a:rPr lang="pt-BR" sz="1200" dirty="0">
+                <a:latin typeface="Arial" panose="020B0604020202020204" pitchFamily="34" charset="0"/>
+                <a:cs typeface="Arial" panose="020B0604020202020204" pitchFamily="34" charset="0"/>
+              </a:rPr>
+              <a:t>Refinamento</a:t>
+            </a:r>
+          </a:p>
+          <a:p>
+            <a:pPr marL="800100" lvl="1" indent="-342900" algn="l">
+              <a:lnSpc>
+                <a:spcPct val="100000"/>
+              </a:lnSpc>
+              <a:buFont typeface="Arial" panose="020B0604020202020204" pitchFamily="34" charset="0"/>
+              <a:buChar char="•"/>
+            </a:pPr>
+            <a:r>
+              <a:rPr lang="pt-BR" sz="1200" dirty="0">
+                <a:latin typeface="Arial" panose="020B0604020202020204" pitchFamily="34" charset="0"/>
+                <a:cs typeface="Arial" panose="020B0604020202020204" pitchFamily="34" charset="0"/>
+              </a:rPr>
+              <a:t>Trabalhos futuros</a:t>
+            </a:r>
+          </a:p>
+          <a:p>
+            <a:pPr marL="800100" lvl="1" indent="-342900" algn="l">
+              <a:lnSpc>
+                <a:spcPct val="100000"/>
+              </a:lnSpc>
+              <a:buAutoNum type="arabicPeriod"/>
+            </a:pPr>
+            <a:endParaRPr lang="pt-BR" sz="1200" dirty="0">
+              <a:latin typeface="Arial" panose="020B0604020202020204" pitchFamily="34" charset="0"/>
+              <a:cs typeface="Arial" panose="020B0604020202020204" pitchFamily="34" charset="0"/>
+            </a:endParaRPr>
+          </a:p>
+        </p:txBody>
+      </p:sp>
+      <p:pic>
+        <p:nvPicPr>
+          <p:cNvPr id="2050" name="Picture 2" descr="Logomarcas">
+            <a:extLst>
+              <a:ext uri="{FF2B5EF4-FFF2-40B4-BE49-F238E27FC236}">
+                <a16:creationId xmlns:a16="http://schemas.microsoft.com/office/drawing/2014/main" id="{649A176D-48AC-0BE4-8D78-2B7EB3A40A00}"/>
+              </a:ext>
+            </a:extLst>
+          </p:cNvPr>
+          <p:cNvPicPr>
+            <a:picLocks noChangeAspect="1" noChangeArrowheads="1"/>
+          </p:cNvPicPr>
+          <p:nvPr/>
+        </p:nvPicPr>
+        <p:blipFill>
+          <a:blip r:embed="rId2">
+            <a:extLst>
+              <a:ext uri="{28A0092B-C50C-407E-A947-70E740481C1C}">
+                <a14:useLocalDpi xmlns:a14="http://schemas.microsoft.com/office/drawing/2010/main" val="0"/>
+              </a:ext>
+            </a:extLst>
+          </a:blip>
+          <a:srcRect/>
+          <a:stretch>
+            <a:fillRect/>
+          </a:stretch>
+        </p:blipFill>
+        <p:spPr bwMode="auto">
+          <a:xfrm>
+            <a:off x="10663716" y="269656"/>
+            <a:ext cx="1210588" cy="1236455"/>
+          </a:xfrm>
+          <a:prstGeom prst="rect">
+            <a:avLst/>
+          </a:prstGeom>
+          <a:noFill/>
+          <a:extLst>
+            <a:ext uri="{909E8E84-426E-40DD-AFC4-6F175D3DCCD1}">
+              <a14:hiddenFill xmlns:a14="http://schemas.microsoft.com/office/drawing/2010/main">
+                <a:solidFill>
+                  <a:srgbClr val="FFFFFF"/>
+                </a:solidFill>
+              </a14:hiddenFill>
+            </a:ext>
+          </a:extLst>
+        </p:spPr>
+      </p:pic>
+    </p:spTree>
+    <p:extLst>
+      <p:ext uri="{BB962C8B-B14F-4D97-AF65-F5344CB8AC3E}">
+        <p14:creationId xmlns:p14="http://schemas.microsoft.com/office/powerpoint/2010/main" val="3959790437"/>
+      </p:ext>
+    </p:extLst>
+  </p:cSld>
+  <p:clrMapOvr>
+    <a:masterClrMapping/>
+  </p:clrMapOvr>
+</p:sld>
+</file>
+
+<file path=ppt/slides/slide20.xml><?xml version="1.0" encoding="utf-8"?>
 <p:sld xmlns:a="http://schemas.openxmlformats.org/drawingml/2006/main" xmlns:r="http://schemas.openxmlformats.org/officeDocument/2006/relationships" xmlns:p="http://schemas.openxmlformats.org/presentationml/2006/main">
   <p:cSld>
     <p:spTree>
@@ -12911,7 +12504,7 @@
 </p:sld>
 </file>
 
-<file path=ppt/slides/slide22.xml><?xml version="1.0" encoding="utf-8"?>
+<file path=ppt/slides/slide21.xml><?xml version="1.0" encoding="utf-8"?>
 <p:sld xmlns:a="http://schemas.openxmlformats.org/drawingml/2006/main" xmlns:r="http://schemas.openxmlformats.org/officeDocument/2006/relationships" xmlns:p="http://schemas.openxmlformats.org/presentationml/2006/main">
   <p:cSld>
     <p:spTree>
@@ -13396,7 +12989,7 @@
 </p:sld>
 </file>
 
-<file path=ppt/slides/slide23.xml><?xml version="1.0" encoding="utf-8"?>
+<file path=ppt/slides/slide22.xml><?xml version="1.0" encoding="utf-8"?>
 <p:sld xmlns:a="http://schemas.openxmlformats.org/drawingml/2006/main" xmlns:r="http://schemas.openxmlformats.org/officeDocument/2006/relationships" xmlns:p="http://schemas.openxmlformats.org/presentationml/2006/main">
   <p:cSld>
     <p:spTree>
@@ -14053,7 +13646,7 @@
 </p:sld>
 </file>
 
-<file path=ppt/slides/slide24.xml><?xml version="1.0" encoding="utf-8"?>
+<file path=ppt/slides/slide23.xml><?xml version="1.0" encoding="utf-8"?>
 <p:sld xmlns:a="http://schemas.openxmlformats.org/drawingml/2006/main" xmlns:r="http://schemas.openxmlformats.org/officeDocument/2006/relationships" xmlns:p="http://schemas.openxmlformats.org/presentationml/2006/main">
   <p:cSld>
     <p:spTree>
@@ -15095,7 +14688,7 @@
 </p:sld>
 </file>
 
-<file path=ppt/slides/slide25.xml><?xml version="1.0" encoding="utf-8"?>
+<file path=ppt/slides/slide24.xml><?xml version="1.0" encoding="utf-8"?>
 <p:sld xmlns:a="http://schemas.openxmlformats.org/drawingml/2006/main" xmlns:r="http://schemas.openxmlformats.org/officeDocument/2006/relationships" xmlns:p="http://schemas.openxmlformats.org/presentationml/2006/main">
   <p:cSld>
     <p:spTree>
@@ -18405,7 +17998,7 @@
             </a:r>
             <a:r>
               <a:rPr lang="pt-BR" dirty="0"/>
-              <a:t> – Mínimos Quadrados Parciais com Informação Temporal</a:t>
+              <a:t> – Mínimos Quadrados Parciais Totais</a:t>
             </a:r>
           </a:p>
           <a:p>
